--- a/presentation/team_addis_demand_ai_slides.pptx
+++ b/presentation/team_addis_demand_ai_slides.pptx
@@ -506,7 +506,7 @@
           <a:lstStyle/>
           <a:p>
             <a:r>
-              <a:t>Open with the ops problem. Emphasize three raw tables and that joining clocks/zones is half the work. Mention synthetic data for training.</a:t>
+              <a:t>Open with the ops problem (45s). Point at the four metric cards, then the three source chips. Emphasize chronological validation and no leakage features. Mention synthetic training data briefly.</a:t>
             </a:r>
           </a:p>
         </p:txBody>
@@ -576,7 +576,7 @@
           <a:lstStyle/>
           <a:p>
             <a:r>
-              <a:t>Walk the join map left-to-right. Stress the +3h clock bug — wrong clock kills the rain signal. Point at fig06: afternoon temp peak only after conversion.</a:t>
+              <a:t>Walk clocks then joins (60s). Stress the +3h bug — wrong clock kills the rain signal. Point at fig06: afternoon temperature peak only after conversion.</a:t>
             </a:r>
           </a:p>
         </p:txBody>
@@ -646,7 +646,7 @@
           <a:lstStyle/>
           <a:p>
             <a:r>
-              <a:t>Two takeaways only. Growth → week_index + lags. Football before-window justifies ±2h features. These are from Deliverable B/C figures.</a:t>
+              <a:t>Two takeaways only (50s). Growth → week_index + lags. Football before-window justifies ±2h features. Figures are from Deliverable B/C.</a:t>
             </a:r>
           </a:p>
         </p:txBody>
@@ -716,7 +716,7 @@
           <a:lstStyle/>
           <a:p>
             <a:r>
-              <a:t>Seasonal naive is the bar. HistGBM clears it. Ablation shows joins were worth it with tuned params. Mention Rule 5/6/7 briefly.</a:t>
+              <a:t>Seasonal naive is the bar (60s). HistGBM clears it. Ablation shows joins were worth it. Mention Rule 5/6/7 briefly. Headline 10.16 is tuned; fig10 bars show family comparison.</a:t>
             </a:r>
           </a:p>
         </p:txBody>
@@ -786,7 +786,7 @@
           <a:lstStyle/>
           <a:p>
             <a:r>
-              <a:t>Live demo: pick Kazanchis on a match day (e.g. 9 Nov) and show weather/event lookup + drivers. Close with honest next steps. Invite judges to choose zone/date.</a:t>
+              <a:t>Handoff to live demo (45s + live). Local: python -m streamlit run app/app.py → http://localhost:8501. Pick Kazanchis on a match day (e.g. 9 Nov); show weather/event lookup + drivers. Close with honest next steps. Invite judges to choose zone/date.</a:t>
             </a:r>
           </a:p>
         </p:txBody>
@@ -3801,7 +3801,50 @@
         <p:spPr>
           <a:xfrm>
             <a:off x="0" y="0"/>
-            <a:ext cx="12191695" cy="960120"/>
+            <a:ext cx="12191695" cy="6858000"/>
+          </a:xfrm>
+          <a:prstGeom prst="rect">
+            <a:avLst/>
+          </a:prstGeom>
+          <a:solidFill>
+            <a:srgbClr val="F4F7FA"/>
+          </a:solidFill>
+          <a:ln>
+            <a:noFill/>
+          </a:ln>
+        </p:spPr>
+        <p:style>
+          <a:lnRef idx="1">
+            <a:schemeClr val="accent1"/>
+          </a:lnRef>
+          <a:fillRef idx="3">
+            <a:schemeClr val="accent1"/>
+          </a:fillRef>
+          <a:effectRef idx="2">
+            <a:schemeClr val="accent1"/>
+          </a:effectRef>
+          <a:fontRef idx="minor">
+            <a:schemeClr val="lt1"/>
+          </a:fontRef>
+        </p:style>
+        <p:txBody>
+          <a:bodyPr rtlCol="0" anchor="ctr"/>
+          <a:lstStyle/>
+          <a:p>
+            <a:pPr algn="ctr"/>
+          </a:p>
+        </p:txBody>
+      </p:sp>
+      <p:sp>
+        <p:nvSpPr>
+          <p:cNvPr id="3" name="Rectangle 2"/>
+          <p:cNvSpPr/>
+          <p:nvPr/>
+        </p:nvSpPr>
+        <p:spPr>
+          <a:xfrm>
+            <a:off x="0" y="0"/>
+            <a:ext cx="12191695" cy="868680"/>
           </a:xfrm>
           <a:prstGeom prst="rect">
             <a:avLst/>
@@ -3828,32 +3871,127 @@
           </a:fontRef>
         </p:style>
         <p:txBody>
-          <a:bodyPr rtlCol="0" anchor="ctr" lIns="365760" tIns="228600"/>
+          <a:bodyPr rtlCol="0" anchor="ctr" wrap="square" lIns="411480" tIns="201168" rIns="1097280"/>
           <a:lstStyle/>
           <a:p>
             <a:pPr algn="l"/>
             <a:r>
-              <a:rPr sz="2600" b="1">
+              <a:rPr sz="2400" b="1">
                 <a:solidFill>
                   <a:srgbClr val="FFFFFF"/>
                 </a:solidFill>
                 <a:latin typeface="Calibri"/>
               </a:rPr>
-              <a:t>1 · Addis Demand AI — Addis ride demand forecasting</a:t>
-            </a:r>
-          </a:p>
-        </p:txBody>
-      </p:sp>
-      <p:sp>
-        <p:nvSpPr>
-          <p:cNvPr id="3" name="TextBox 2"/>
+              <a:t>1  ·  Addis Demand AI — Addis ride demand forecasting</a:t>
+            </a:r>
+          </a:p>
+        </p:txBody>
+      </p:sp>
+      <p:sp>
+        <p:nvSpPr>
+          <p:cNvPr id="4" name="Rectangle 3"/>
+          <p:cNvSpPr/>
+          <p:nvPr/>
+        </p:nvSpPr>
+        <p:spPr>
+          <a:xfrm>
+            <a:off x="0" y="868680"/>
+            <a:ext cx="12191695" cy="73152"/>
+          </a:xfrm>
+          <a:prstGeom prst="rect">
+            <a:avLst/>
+          </a:prstGeom>
+          <a:solidFill>
+            <a:srgbClr val="0072B2"/>
+          </a:solidFill>
+          <a:ln>
+            <a:noFill/>
+          </a:ln>
+        </p:spPr>
+        <p:style>
+          <a:lnRef idx="1">
+            <a:schemeClr val="accent1"/>
+          </a:lnRef>
+          <a:fillRef idx="3">
+            <a:schemeClr val="accent1"/>
+          </a:fillRef>
+          <a:effectRef idx="2">
+            <a:schemeClr val="accent1"/>
+          </a:effectRef>
+          <a:fontRef idx="minor">
+            <a:schemeClr val="lt1"/>
+          </a:fontRef>
+        </p:style>
+        <p:txBody>
+          <a:bodyPr rtlCol="0" anchor="ctr"/>
+          <a:lstStyle/>
+          <a:p>
+            <a:pPr algn="ctr"/>
+          </a:p>
+        </p:txBody>
+      </p:sp>
+      <p:sp>
+        <p:nvSpPr>
+          <p:cNvPr id="5" name="Rounded Rectangle 4"/>
+          <p:cNvSpPr/>
+          <p:nvPr/>
+        </p:nvSpPr>
+        <p:spPr>
+          <a:xfrm>
+            <a:off x="11109960" y="256032"/>
+            <a:ext cx="777240" cy="365760"/>
+          </a:xfrm>
+          <a:prstGeom prst="roundRect">
+            <a:avLst/>
+          </a:prstGeom>
+          <a:solidFill>
+            <a:srgbClr val="0072B2"/>
+          </a:solidFill>
+          <a:ln>
+            <a:noFill/>
+          </a:ln>
+        </p:spPr>
+        <p:style>
+          <a:lnRef idx="1">
+            <a:schemeClr val="accent1"/>
+          </a:lnRef>
+          <a:fillRef idx="3">
+            <a:schemeClr val="accent1"/>
+          </a:fillRef>
+          <a:effectRef idx="2">
+            <a:schemeClr val="accent1"/>
+          </a:effectRef>
+          <a:fontRef idx="minor">
+            <a:schemeClr val="lt1"/>
+          </a:fontRef>
+        </p:style>
+        <p:txBody>
+          <a:bodyPr rtlCol="0" anchor="ctr"/>
+          <a:lstStyle/>
+          <a:p>
+            <a:pPr algn="ctr"/>
+            <a:r>
+              <a:rPr sz="1200" b="1">
+                <a:solidFill>
+                  <a:srgbClr val="FFFFFF"/>
+                </a:solidFill>
+                <a:latin typeface="Calibri"/>
+              </a:rPr>
+              <a:t>1/5</a:t>
+            </a:r>
+          </a:p>
+        </p:txBody>
+      </p:sp>
+      <p:sp>
+        <p:nvSpPr>
+          <p:cNvPr id="6" name="TextBox 5"/>
           <p:cNvSpPr txBox="1"/>
           <p:nvPr/>
         </p:nvSpPr>
         <p:spPr>
           <a:xfrm>
             <a:off x="457200" y="1097280"/>
-            <a:ext cx="11155680" cy="822960"/>
+            <a:ext cx="11155680" cy="502920"/>
           </a:xfrm>
           <a:prstGeom prst="rect">
             <a:avLst/>
@@ -3866,31 +4004,54 @@
           </a:bodyPr>
           <a:lstStyle/>
           <a:p>
-            <a:pPr>
+            <a:pPr algn="l">
               <a:spcAft>
-                <a:spcPts val="600"/>
+                <a:spcPts val="400"/>
               </a:spcAft>
             </a:pPr>
             <a:r>
-              <a:rPr sz="1400" b="0">
-                <a:solidFill>
-                  <a:srgbClr val="555555"/>
+              <a:rPr sz="1300" b="0">
+                <a:solidFill>
+                  <a:srgbClr val="5A5A5A"/>
                 </a:solidFill>
                 <a:latin typeface="Calibri"/>
               </a:rPr>
               <a:t>Abraham Getachew · Ahmed Hussen · Natanim Masresha · Nigus Shiferaw · Tekilu Asefa</a:t>
             </a:r>
           </a:p>
-          <a:p>
-            <a:pPr>
+        </p:txBody>
+      </p:sp>
+      <p:sp>
+        <p:nvSpPr>
+          <p:cNvPr id="7" name="TextBox 6"/>
+          <p:cNvSpPr txBox="1"/>
+          <p:nvPr/>
+        </p:nvSpPr>
+        <p:spPr>
+          <a:xfrm>
+            <a:off x="457200" y="1417320"/>
+            <a:ext cx="11155680" cy="365760"/>
+          </a:xfrm>
+          <a:prstGeom prst="rect">
+            <a:avLst/>
+          </a:prstGeom>
+          <a:noFill/>
+        </p:spPr>
+        <p:txBody>
+          <a:bodyPr wrap="square">
+            <a:spAutoFit/>
+          </a:bodyPr>
+          <a:lstStyle/>
+          <a:p>
+            <a:pPr algn="l">
               <a:spcAft>
-                <a:spcPts val="600"/>
+                <a:spcPts val="400"/>
               </a:spcAft>
             </a:pPr>
             <a:r>
-              <a:rPr sz="1400" b="0">
-                <a:solidFill>
-                  <a:srgbClr val="555555"/>
+              <a:rPr sz="1200" b="0">
+                <a:solidFill>
+                  <a:srgbClr val="5A5A5A"/>
                 </a:solidFill>
                 <a:latin typeface="Calibri"/>
               </a:rPr>
@@ -3901,14 +4062,102 @@
       </p:sp>
       <p:sp>
         <p:nvSpPr>
-          <p:cNvPr id="4" name="TextBox 3"/>
+          <p:cNvPr id="8" name="Rounded Rectangle 7"/>
+          <p:cNvSpPr/>
+          <p:nvPr/>
+        </p:nvSpPr>
+        <p:spPr>
+          <a:xfrm>
+            <a:off x="457200" y="1965960"/>
+            <a:ext cx="2743200" cy="1051560"/>
+          </a:xfrm>
+          <a:prstGeom prst="roundRect">
+            <a:avLst/>
+          </a:prstGeom>
+          <a:solidFill>
+            <a:srgbClr val="FFFFFF"/>
+          </a:solidFill>
+          <a:ln w="12700">
+            <a:solidFill>
+              <a:srgbClr val="D0D7DE"/>
+            </a:solidFill>
+          </a:ln>
+        </p:spPr>
+        <p:style>
+          <a:lnRef idx="1">
+            <a:schemeClr val="accent1"/>
+          </a:lnRef>
+          <a:fillRef idx="3">
+            <a:schemeClr val="accent1"/>
+          </a:fillRef>
+          <a:effectRef idx="2">
+            <a:schemeClr val="accent1"/>
+          </a:effectRef>
+          <a:fontRef idx="minor">
+            <a:schemeClr val="lt1"/>
+          </a:fontRef>
+        </p:style>
+        <p:txBody>
+          <a:bodyPr rtlCol="0" anchor="ctr"/>
+          <a:lstStyle/>
+          <a:p>
+            <a:pPr algn="ctr"/>
+          </a:p>
+        </p:txBody>
+      </p:sp>
+      <p:sp>
+        <p:nvSpPr>
+          <p:cNvPr id="9" name="Rectangle 8"/>
+          <p:cNvSpPr/>
+          <p:nvPr/>
+        </p:nvSpPr>
+        <p:spPr>
+          <a:xfrm>
+            <a:off x="457200" y="1965960"/>
+            <a:ext cx="73152" cy="1051560"/>
+          </a:xfrm>
+          <a:prstGeom prst="rect">
+            <a:avLst/>
+          </a:prstGeom>
+          <a:solidFill>
+            <a:srgbClr val="0072B2"/>
+          </a:solidFill>
+          <a:ln>
+            <a:noFill/>
+          </a:ln>
+        </p:spPr>
+        <p:style>
+          <a:lnRef idx="1">
+            <a:schemeClr val="accent1"/>
+          </a:lnRef>
+          <a:fillRef idx="3">
+            <a:schemeClr val="accent1"/>
+          </a:fillRef>
+          <a:effectRef idx="2">
+            <a:schemeClr val="accent1"/>
+          </a:effectRef>
+          <a:fontRef idx="minor">
+            <a:schemeClr val="lt1"/>
+          </a:fontRef>
+        </p:style>
+        <p:txBody>
+          <a:bodyPr rtlCol="0" anchor="ctr"/>
+          <a:lstStyle/>
+          <a:p>
+            <a:pPr algn="ctr"/>
+          </a:p>
+        </p:txBody>
+      </p:sp>
+      <p:sp>
+        <p:nvSpPr>
+          <p:cNvPr id="10" name="TextBox 9"/>
           <p:cNvSpPr txBox="1"/>
           <p:nvPr/>
         </p:nvSpPr>
         <p:spPr>
           <a:xfrm>
-            <a:off x="457200" y="1920240"/>
-            <a:ext cx="11155680" cy="4389120"/>
+            <a:off x="640080" y="2130552"/>
+            <a:ext cx="2468880" cy="822960"/>
           </a:xfrm>
           <a:prstGeom prst="rect">
             <a:avLst/>
@@ -3921,99 +4170,750 @@
           </a:bodyPr>
           <a:lstStyle/>
           <a:p>
+            <a:r>
+              <a:rPr sz="2600" b="1">
+                <a:solidFill>
+                  <a:srgbClr val="0B3D5C"/>
+                </a:solidFill>
+                <a:latin typeface="Calibri"/>
+              </a:rPr>
+              <a:t>12 zones</a:t>
+            </a:r>
+          </a:p>
+          <a:p>
+            <a:r>
+              <a:rPr sz="1200" b="0">
+                <a:solidFill>
+                  <a:srgbClr val="5A5A5A"/>
+                </a:solidFill>
+                <a:latin typeface="Calibri"/>
+              </a:rPr>
+              <a:t>Addis Ababa pickups</a:t>
+            </a:r>
+          </a:p>
+        </p:txBody>
+      </p:sp>
+      <p:sp>
+        <p:nvSpPr>
+          <p:cNvPr id="11" name="Rounded Rectangle 10"/>
+          <p:cNvSpPr/>
+          <p:nvPr/>
+        </p:nvSpPr>
+        <p:spPr>
+          <a:xfrm>
+            <a:off x="3383280" y="1965960"/>
+            <a:ext cx="2743200" cy="1051560"/>
+          </a:xfrm>
+          <a:prstGeom prst="roundRect">
+            <a:avLst/>
+          </a:prstGeom>
+          <a:solidFill>
+            <a:srgbClr val="FFFFFF"/>
+          </a:solidFill>
+          <a:ln w="12700">
+            <a:solidFill>
+              <a:srgbClr val="D0D7DE"/>
+            </a:solidFill>
+          </a:ln>
+        </p:spPr>
+        <p:style>
+          <a:lnRef idx="1">
+            <a:schemeClr val="accent1"/>
+          </a:lnRef>
+          <a:fillRef idx="3">
+            <a:schemeClr val="accent1"/>
+          </a:fillRef>
+          <a:effectRef idx="2">
+            <a:schemeClr val="accent1"/>
+          </a:effectRef>
+          <a:fontRef idx="minor">
+            <a:schemeClr val="lt1"/>
+          </a:fontRef>
+        </p:style>
+        <p:txBody>
+          <a:bodyPr rtlCol="0" anchor="ctr"/>
+          <a:lstStyle/>
+          <a:p>
+            <a:pPr algn="ctr"/>
+          </a:p>
+        </p:txBody>
+      </p:sp>
+      <p:sp>
+        <p:nvSpPr>
+          <p:cNvPr id="12" name="Rectangle 11"/>
+          <p:cNvSpPr/>
+          <p:nvPr/>
+        </p:nvSpPr>
+        <p:spPr>
+          <a:xfrm>
+            <a:off x="3383280" y="1965960"/>
+            <a:ext cx="73152" cy="1051560"/>
+          </a:xfrm>
+          <a:prstGeom prst="rect">
+            <a:avLst/>
+          </a:prstGeom>
+          <a:solidFill>
+            <a:srgbClr val="009E73"/>
+          </a:solidFill>
+          <a:ln>
+            <a:noFill/>
+          </a:ln>
+        </p:spPr>
+        <p:style>
+          <a:lnRef idx="1">
+            <a:schemeClr val="accent1"/>
+          </a:lnRef>
+          <a:fillRef idx="3">
+            <a:schemeClr val="accent1"/>
+          </a:fillRef>
+          <a:effectRef idx="2">
+            <a:schemeClr val="accent1"/>
+          </a:effectRef>
+          <a:fontRef idx="minor">
+            <a:schemeClr val="lt1"/>
+          </a:fontRef>
+        </p:style>
+        <p:txBody>
+          <a:bodyPr rtlCol="0" anchor="ctr"/>
+          <a:lstStyle/>
+          <a:p>
+            <a:pPr algn="ctr"/>
+          </a:p>
+        </p:txBody>
+      </p:sp>
+      <p:sp>
+        <p:nvSpPr>
+          <p:cNvPr id="13" name="TextBox 12"/>
+          <p:cNvSpPr txBox="1"/>
+          <p:nvPr/>
+        </p:nvSpPr>
+        <p:spPr>
+          <a:xfrm>
+            <a:off x="3566160" y="2130552"/>
+            <a:ext cx="2468880" cy="822960"/>
+          </a:xfrm>
+          <a:prstGeom prst="rect">
+            <a:avLst/>
+          </a:prstGeom>
+          <a:noFill/>
+        </p:spPr>
+        <p:txBody>
+          <a:bodyPr wrap="square">
+            <a:spAutoFit/>
+          </a:bodyPr>
+          <a:lstStyle/>
+          <a:p>
+            <a:r>
+              <a:rPr sz="2600" b="1">
+                <a:solidFill>
+                  <a:srgbClr val="0B3D5C"/>
+                </a:solidFill>
+                <a:latin typeface="Calibri"/>
+              </a:rPr>
+              <a:t>1–14 Nov</a:t>
+            </a:r>
+          </a:p>
+          <a:p>
+            <a:r>
+              <a:rPr sz="1200" b="0">
+                <a:solidFill>
+                  <a:srgbClr val="5A5A5A"/>
+                </a:solidFill>
+                <a:latin typeface="Calibri"/>
+              </a:rPr>
+              <a:t>Forecast fortnight</a:t>
+            </a:r>
+          </a:p>
+        </p:txBody>
+      </p:sp>
+      <p:sp>
+        <p:nvSpPr>
+          <p:cNvPr id="14" name="Rounded Rectangle 13"/>
+          <p:cNvSpPr/>
+          <p:nvPr/>
+        </p:nvSpPr>
+        <p:spPr>
+          <a:xfrm>
+            <a:off x="6309360" y="1965960"/>
+            <a:ext cx="2743200" cy="1051560"/>
+          </a:xfrm>
+          <a:prstGeom prst="roundRect">
+            <a:avLst/>
+          </a:prstGeom>
+          <a:solidFill>
+            <a:srgbClr val="FFFFFF"/>
+          </a:solidFill>
+          <a:ln w="12700">
+            <a:solidFill>
+              <a:srgbClr val="D0D7DE"/>
+            </a:solidFill>
+          </a:ln>
+        </p:spPr>
+        <p:style>
+          <a:lnRef idx="1">
+            <a:schemeClr val="accent1"/>
+          </a:lnRef>
+          <a:fillRef idx="3">
+            <a:schemeClr val="accent1"/>
+          </a:fillRef>
+          <a:effectRef idx="2">
+            <a:schemeClr val="accent1"/>
+          </a:effectRef>
+          <a:fontRef idx="minor">
+            <a:schemeClr val="lt1"/>
+          </a:fontRef>
+        </p:style>
+        <p:txBody>
+          <a:bodyPr rtlCol="0" anchor="ctr"/>
+          <a:lstStyle/>
+          <a:p>
+            <a:pPr algn="ctr"/>
+          </a:p>
+        </p:txBody>
+      </p:sp>
+      <p:sp>
+        <p:nvSpPr>
+          <p:cNvPr id="15" name="Rectangle 14"/>
+          <p:cNvSpPr/>
+          <p:nvPr/>
+        </p:nvSpPr>
+        <p:spPr>
+          <a:xfrm>
+            <a:off x="6309360" y="1965960"/>
+            <a:ext cx="73152" cy="1051560"/>
+          </a:xfrm>
+          <a:prstGeom prst="rect">
+            <a:avLst/>
+          </a:prstGeom>
+          <a:solidFill>
+            <a:srgbClr val="0072B2"/>
+          </a:solidFill>
+          <a:ln>
+            <a:noFill/>
+          </a:ln>
+        </p:spPr>
+        <p:style>
+          <a:lnRef idx="1">
+            <a:schemeClr val="accent1"/>
+          </a:lnRef>
+          <a:fillRef idx="3">
+            <a:schemeClr val="accent1"/>
+          </a:fillRef>
+          <a:effectRef idx="2">
+            <a:schemeClr val="accent1"/>
+          </a:effectRef>
+          <a:fontRef idx="minor">
+            <a:schemeClr val="lt1"/>
+          </a:fontRef>
+        </p:style>
+        <p:txBody>
+          <a:bodyPr rtlCol="0" anchor="ctr"/>
+          <a:lstStyle/>
+          <a:p>
+            <a:pPr algn="ctr"/>
+          </a:p>
+        </p:txBody>
+      </p:sp>
+      <p:sp>
+        <p:nvSpPr>
+          <p:cNvPr id="16" name="TextBox 15"/>
+          <p:cNvSpPr txBox="1"/>
+          <p:nvPr/>
+        </p:nvSpPr>
+        <p:spPr>
+          <a:xfrm>
+            <a:off x="6492240" y="2130552"/>
+            <a:ext cx="2468880" cy="822960"/>
+          </a:xfrm>
+          <a:prstGeom prst="rect">
+            <a:avLst/>
+          </a:prstGeom>
+          <a:noFill/>
+        </p:spPr>
+        <p:txBody>
+          <a:bodyPr wrap="square">
+            <a:spAutoFit/>
+          </a:bodyPr>
+          <a:lstStyle/>
+          <a:p>
+            <a:r>
+              <a:rPr sz="2600" b="1">
+                <a:solidFill>
+                  <a:srgbClr val="0B3D5C"/>
+                </a:solidFill>
+                <a:latin typeface="Calibri"/>
+              </a:rPr>
+              <a:t>~85k</a:t>
+            </a:r>
+          </a:p>
+          <a:p>
+            <a:r>
+              <a:rPr sz="1200" b="0">
+                <a:solidFill>
+                  <a:srgbClr val="5A5A5A"/>
+                </a:solidFill>
+                <a:latin typeface="Calibri"/>
+              </a:rPr>
+              <a:t>Train zone-hours</a:t>
+            </a:r>
+          </a:p>
+        </p:txBody>
+      </p:sp>
+      <p:sp>
+        <p:nvSpPr>
+          <p:cNvPr id="17" name="Rounded Rectangle 16"/>
+          <p:cNvSpPr/>
+          <p:nvPr/>
+        </p:nvSpPr>
+        <p:spPr>
+          <a:xfrm>
+            <a:off x="9235440" y="1965960"/>
+            <a:ext cx="2468880" cy="1051560"/>
+          </a:xfrm>
+          <a:prstGeom prst="roundRect">
+            <a:avLst/>
+          </a:prstGeom>
+          <a:solidFill>
+            <a:srgbClr val="FFFFFF"/>
+          </a:solidFill>
+          <a:ln w="12700">
+            <a:solidFill>
+              <a:srgbClr val="D0D7DE"/>
+            </a:solidFill>
+          </a:ln>
+        </p:spPr>
+        <p:style>
+          <a:lnRef idx="1">
+            <a:schemeClr val="accent1"/>
+          </a:lnRef>
+          <a:fillRef idx="3">
+            <a:schemeClr val="accent1"/>
+          </a:fillRef>
+          <a:effectRef idx="2">
+            <a:schemeClr val="accent1"/>
+          </a:effectRef>
+          <a:fontRef idx="minor">
+            <a:schemeClr val="lt1"/>
+          </a:fontRef>
+        </p:style>
+        <p:txBody>
+          <a:bodyPr rtlCol="0" anchor="ctr"/>
+          <a:lstStyle/>
+          <a:p>
+            <a:pPr algn="ctr"/>
+          </a:p>
+        </p:txBody>
+      </p:sp>
+      <p:sp>
+        <p:nvSpPr>
+          <p:cNvPr id="18" name="Rectangle 17"/>
+          <p:cNvSpPr/>
+          <p:nvPr/>
+        </p:nvSpPr>
+        <p:spPr>
+          <a:xfrm>
+            <a:off x="9235440" y="1965960"/>
+            <a:ext cx="73152" cy="1051560"/>
+          </a:xfrm>
+          <a:prstGeom prst="rect">
+            <a:avLst/>
+          </a:prstGeom>
+          <a:solidFill>
+            <a:srgbClr val="009E73"/>
+          </a:solidFill>
+          <a:ln>
+            <a:noFill/>
+          </a:ln>
+        </p:spPr>
+        <p:style>
+          <a:lnRef idx="1">
+            <a:schemeClr val="accent1"/>
+          </a:lnRef>
+          <a:fillRef idx="3">
+            <a:schemeClr val="accent1"/>
+          </a:fillRef>
+          <a:effectRef idx="2">
+            <a:schemeClr val="accent1"/>
+          </a:effectRef>
+          <a:fontRef idx="minor">
+            <a:schemeClr val="lt1"/>
+          </a:fontRef>
+        </p:style>
+        <p:txBody>
+          <a:bodyPr rtlCol="0" anchor="ctr"/>
+          <a:lstStyle/>
+          <a:p>
+            <a:pPr algn="ctr"/>
+          </a:p>
+        </p:txBody>
+      </p:sp>
+      <p:sp>
+        <p:nvSpPr>
+          <p:cNvPr id="19" name="TextBox 18"/>
+          <p:cNvSpPr txBox="1"/>
+          <p:nvPr/>
+        </p:nvSpPr>
+        <p:spPr>
+          <a:xfrm>
+            <a:off x="9418320" y="2130552"/>
+            <a:ext cx="2194560" cy="822960"/>
+          </a:xfrm>
+          <a:prstGeom prst="rect">
+            <a:avLst/>
+          </a:prstGeom>
+          <a:noFill/>
+        </p:spPr>
+        <p:txBody>
+          <a:bodyPr wrap="square">
+            <a:spAutoFit/>
+          </a:bodyPr>
+          <a:lstStyle/>
+          <a:p>
+            <a:r>
+              <a:rPr sz="2600" b="1">
+                <a:solidFill>
+                  <a:srgbClr val="0B3D5C"/>
+                </a:solidFill>
+                <a:latin typeface="Calibri"/>
+              </a:rPr>
+              <a:t>3 tables</a:t>
+            </a:r>
+          </a:p>
+          <a:p>
+            <a:r>
+              <a:rPr sz="1200" b="0">
+                <a:solidFill>
+                  <a:srgbClr val="5A5A5A"/>
+                </a:solidFill>
+                <a:latin typeface="Calibri"/>
+              </a:rPr>
+              <a:t>Trips · weather · events</a:t>
+            </a:r>
+          </a:p>
+        </p:txBody>
+      </p:sp>
+      <p:sp>
+        <p:nvSpPr>
+          <p:cNvPr id="20" name="TextBox 19"/>
+          <p:cNvSpPr txBox="1"/>
+          <p:nvPr/>
+        </p:nvSpPr>
+        <p:spPr>
+          <a:xfrm>
+            <a:off x="457200" y="3246120"/>
+            <a:ext cx="6766560" cy="2926080"/>
+          </a:xfrm>
+          <a:prstGeom prst="rect">
+            <a:avLst/>
+          </a:prstGeom>
+          <a:noFill/>
+        </p:spPr>
+        <p:txBody>
+          <a:bodyPr wrap="square">
+            <a:spAutoFit/>
+          </a:bodyPr>
+          <a:lstStyle/>
+          <a:p>
             <a:pPr>
               <a:spcAft>
-                <a:spcPts val="800"/>
+                <a:spcPts val="1000"/>
               </a:spcAft>
             </a:pPr>
             <a:r>
-              <a:rPr sz="1800" b="0">
-                <a:solidFill>
-                  <a:srgbClr val="222222"/>
+              <a:rPr sz="1700" b="0">
+                <a:solidFill>
+                  <a:srgbClr val="1A1A1A"/>
                 </a:solidFill>
                 <a:latin typeface="Calibri"/>
               </a:rPr>
-              <a:t>•  Goal: forecast hourly trips for 12 Addis Ababa zones, 1–14 Nov 2025</a:t>
+              <a:t>•  Goal: hourly trip forecasts so ops know where drivers should be</a:t>
             </a:r>
           </a:p>
           <a:p>
             <a:pPr>
               <a:spcAft>
-                <a:spcPts val="800"/>
+                <a:spcPts val="1000"/>
               </a:spcAft>
             </a:pPr>
             <a:r>
-              <a:rPr sz="1800" b="0">
-                <a:solidFill>
-                  <a:srgbClr val="222222"/>
+              <a:rPr sz="1700" b="0">
+                <a:solidFill>
+                  <a:srgbClr val="1A1A1A"/>
                 </a:solidFill>
                 <a:latin typeface="Calibri"/>
               </a:rPr>
-              <a:t>•  History: 1 Jan – 31 Oct 2025 (~85k zone-hours)</a:t>
+              <a:t>•  Integrate three messy sources: ride_demand, weather_hourly, events_calendar</a:t>
             </a:r>
           </a:p>
           <a:p>
             <a:pPr>
               <a:spcAft>
-                <a:spcPts val="800"/>
+                <a:spcPts val="1000"/>
               </a:spcAft>
             </a:pPr>
             <a:r>
-              <a:rPr sz="1800" b="0">
-                <a:solidFill>
-                  <a:srgbClr val="222222"/>
+              <a:rPr sz="1700" b="0">
+                <a:solidFill>
+                  <a:srgbClr val="1A1A1A"/>
                 </a:solidFill>
                 <a:latin typeface="Calibri"/>
               </a:rPr>
-              <a:t>•  Three messy tables to integrate — not cleaned for us:</a:t>
+              <a:t>•  Validate by time — never random split</a:t>
             </a:r>
           </a:p>
           <a:p>
             <a:pPr>
               <a:spcAft>
-                <a:spcPts val="800"/>
+                <a:spcPts val="1000"/>
               </a:spcAft>
             </a:pPr>
             <a:r>
-              <a:rPr sz="1800" b="0">
-                <a:solidFill>
-                  <a:srgbClr val="222222"/>
+              <a:rPr sz="1700" b="0">
+                <a:solidFill>
+                  <a:srgbClr val="1A1A1A"/>
                 </a:solidFill>
                 <a:latin typeface="Calibri"/>
               </a:rPr>
-              <a:t>•       ① ride_demand (trips by zone × hour)   ② weather_hourly (city)   ③ events_calendar (intervals)</a:t>
-            </a:r>
-          </a:p>
-          <a:p>
-            <a:pPr>
-              <a:spcAft>
-                <a:spcPts val="800"/>
-              </a:spcAft>
-            </a:pPr>
-            <a:r>
-              <a:rPr sz="1800" b="0">
-                <a:solidFill>
-                  <a:srgbClr val="222222"/>
+              <a:t>•  Only features known at forecast time (no fare / wait / active drivers)</a:t>
+            </a:r>
+          </a:p>
+        </p:txBody>
+      </p:sp>
+      <p:sp>
+        <p:nvSpPr>
+          <p:cNvPr id="21" name="Rounded Rectangle 20"/>
+          <p:cNvSpPr/>
+          <p:nvPr/>
+        </p:nvSpPr>
+        <p:spPr>
+          <a:xfrm>
+            <a:off x="7498079" y="3383280"/>
+            <a:ext cx="4114800" cy="640080"/>
+          </a:xfrm>
+          <a:prstGeom prst="roundRect">
+            <a:avLst/>
+          </a:prstGeom>
+          <a:solidFill>
+            <a:srgbClr val="FFFFFF"/>
+          </a:solidFill>
+          <a:ln>
+            <a:solidFill>
+              <a:srgbClr val="D0D7DE"/>
+            </a:solidFill>
+          </a:ln>
+        </p:spPr>
+        <p:style>
+          <a:lnRef idx="1">
+            <a:schemeClr val="accent1"/>
+          </a:lnRef>
+          <a:fillRef idx="3">
+            <a:schemeClr val="accent1"/>
+          </a:fillRef>
+          <a:effectRef idx="2">
+            <a:schemeClr val="accent1"/>
+          </a:effectRef>
+          <a:fontRef idx="minor">
+            <a:schemeClr val="lt1"/>
+          </a:fontRef>
+        </p:style>
+        <p:txBody>
+          <a:bodyPr rtlCol="0" anchor="ctr" lIns="228600" tIns="164592"/>
+          <a:lstStyle/>
+          <a:p>
+            <a:pPr algn="ctr"/>
+            <a:r>
+              <a:rPr sz="1600" b="1">
+                <a:solidFill>
+                  <a:srgbClr val="0B3D5C"/>
                 </a:solidFill>
                 <a:latin typeface="Calibri"/>
               </a:rPr>
-              <a:t>•  Why it matters: tell drivers where to be, a day or two ahead</a:t>
-            </a:r>
-          </a:p>
-          <a:p>
-            <a:pPr>
-              <a:spcAft>
-                <a:spcPts val="800"/>
-              </a:spcAft>
-            </a:pPr>
-            <a:r>
-              <a:rPr sz="1800" b="0">
-                <a:solidFill>
-                  <a:srgbClr val="222222"/>
+              <a:t>1  ride_demand</a:t>
+            </a:r>
+          </a:p>
+        </p:txBody>
+      </p:sp>
+      <p:sp>
+        <p:nvSpPr>
+          <p:cNvPr id="22" name="Rounded Rectangle 21"/>
+          <p:cNvSpPr/>
+          <p:nvPr/>
+        </p:nvSpPr>
+        <p:spPr>
+          <a:xfrm>
+            <a:off x="7498079" y="4160520"/>
+            <a:ext cx="4114800" cy="640080"/>
+          </a:xfrm>
+          <a:prstGeom prst="roundRect">
+            <a:avLst/>
+          </a:prstGeom>
+          <a:solidFill>
+            <a:srgbClr val="FFFFFF"/>
+          </a:solidFill>
+          <a:ln>
+            <a:solidFill>
+              <a:srgbClr val="D0D7DE"/>
+            </a:solidFill>
+          </a:ln>
+        </p:spPr>
+        <p:style>
+          <a:lnRef idx="1">
+            <a:schemeClr val="accent1"/>
+          </a:lnRef>
+          <a:fillRef idx="3">
+            <a:schemeClr val="accent1"/>
+          </a:fillRef>
+          <a:effectRef idx="2">
+            <a:schemeClr val="accent1"/>
+          </a:effectRef>
+          <a:fontRef idx="minor">
+            <a:schemeClr val="lt1"/>
+          </a:fontRef>
+        </p:style>
+        <p:txBody>
+          <a:bodyPr rtlCol="0" anchor="ctr" lIns="228600" tIns="164592"/>
+          <a:lstStyle/>
+          <a:p>
+            <a:pPr algn="ctr"/>
+            <a:r>
+              <a:rPr sz="1600" b="1">
+                <a:solidFill>
+                  <a:srgbClr val="0B3D5C"/>
                 </a:solidFill>
                 <a:latin typeface="Calibri"/>
               </a:rPr>
-              <a:t>•  Key constraint: validate by time; only use features known at forecast time</a:t>
+              <a:t>2  weather_hourly</a:t>
+            </a:r>
+          </a:p>
+        </p:txBody>
+      </p:sp>
+      <p:sp>
+        <p:nvSpPr>
+          <p:cNvPr id="23" name="Rounded Rectangle 22"/>
+          <p:cNvSpPr/>
+          <p:nvPr/>
+        </p:nvSpPr>
+        <p:spPr>
+          <a:xfrm>
+            <a:off x="7498079" y="4937760"/>
+            <a:ext cx="4114800" cy="640080"/>
+          </a:xfrm>
+          <a:prstGeom prst="roundRect">
+            <a:avLst/>
+          </a:prstGeom>
+          <a:solidFill>
+            <a:srgbClr val="FFFFFF"/>
+          </a:solidFill>
+          <a:ln>
+            <a:solidFill>
+              <a:srgbClr val="D0D7DE"/>
+            </a:solidFill>
+          </a:ln>
+        </p:spPr>
+        <p:style>
+          <a:lnRef idx="1">
+            <a:schemeClr val="accent1"/>
+          </a:lnRef>
+          <a:fillRef idx="3">
+            <a:schemeClr val="accent1"/>
+          </a:fillRef>
+          <a:effectRef idx="2">
+            <a:schemeClr val="accent1"/>
+          </a:effectRef>
+          <a:fontRef idx="minor">
+            <a:schemeClr val="lt1"/>
+          </a:fontRef>
+        </p:style>
+        <p:txBody>
+          <a:bodyPr rtlCol="0" anchor="ctr" lIns="228600" tIns="164592"/>
+          <a:lstStyle/>
+          <a:p>
+            <a:pPr algn="ctr"/>
+            <a:r>
+              <a:rPr sz="1600" b="1">
+                <a:solidFill>
+                  <a:srgbClr val="0B3D5C"/>
+                </a:solidFill>
+                <a:latin typeface="Calibri"/>
+              </a:rPr>
+              <a:t>3  events_calendar</a:t>
+            </a:r>
+          </a:p>
+        </p:txBody>
+      </p:sp>
+      <p:sp>
+        <p:nvSpPr>
+          <p:cNvPr id="24" name="Rectangle 23"/>
+          <p:cNvSpPr/>
+          <p:nvPr/>
+        </p:nvSpPr>
+        <p:spPr>
+          <a:xfrm>
+            <a:off x="411480" y="6446520"/>
+            <a:ext cx="11338560" cy="13716"/>
+          </a:xfrm>
+          <a:prstGeom prst="rect">
+            <a:avLst/>
+          </a:prstGeom>
+          <a:solidFill>
+            <a:srgbClr val="D0D7DE"/>
+          </a:solidFill>
+          <a:ln>
+            <a:noFill/>
+          </a:ln>
+        </p:spPr>
+        <p:style>
+          <a:lnRef idx="1">
+            <a:schemeClr val="accent1"/>
+          </a:lnRef>
+          <a:fillRef idx="3">
+            <a:schemeClr val="accent1"/>
+          </a:fillRef>
+          <a:effectRef idx="2">
+            <a:schemeClr val="accent1"/>
+          </a:effectRef>
+          <a:fontRef idx="minor">
+            <a:schemeClr val="lt1"/>
+          </a:fontRef>
+        </p:style>
+        <p:txBody>
+          <a:bodyPr rtlCol="0" anchor="ctr"/>
+          <a:lstStyle/>
+          <a:p>
+            <a:pPr algn="ctr"/>
+          </a:p>
+        </p:txBody>
+      </p:sp>
+      <p:sp>
+        <p:nvSpPr>
+          <p:cNvPr id="25" name="TextBox 24"/>
+          <p:cNvSpPr txBox="1"/>
+          <p:nvPr/>
+        </p:nvSpPr>
+        <p:spPr>
+          <a:xfrm>
+            <a:off x="411480" y="6492240"/>
+            <a:ext cx="11338560" cy="320040"/>
+          </a:xfrm>
+          <a:prstGeom prst="rect">
+            <a:avLst/>
+          </a:prstGeom>
+          <a:noFill/>
+        </p:spPr>
+        <p:txBody>
+          <a:bodyPr wrap="none">
+            <a:spAutoFit/>
+          </a:bodyPr>
+          <a:lstStyle/>
+          <a:p>
+            <a:r>
+              <a:rPr sz="1100" b="0">
+                <a:solidFill>
+                  <a:srgbClr val="5A5A5A"/>
+                </a:solidFill>
+                <a:latin typeface="Calibri"/>
+              </a:rPr>
+              <a:t>Addis Demand AI  ·  IDAE · EDI-Qiyas-CoDiST Advanced Digital Skills Program  ·  1/5</a:t>
             </a:r>
           </a:p>
         </p:txBody>
@@ -4045,7 +4945,50 @@
         <p:spPr>
           <a:xfrm>
             <a:off x="0" y="0"/>
-            <a:ext cx="12191695" cy="960120"/>
+            <a:ext cx="12191695" cy="6858000"/>
+          </a:xfrm>
+          <a:prstGeom prst="rect">
+            <a:avLst/>
+          </a:prstGeom>
+          <a:solidFill>
+            <a:srgbClr val="F4F7FA"/>
+          </a:solidFill>
+          <a:ln>
+            <a:noFill/>
+          </a:ln>
+        </p:spPr>
+        <p:style>
+          <a:lnRef idx="1">
+            <a:schemeClr val="accent1"/>
+          </a:lnRef>
+          <a:fillRef idx="3">
+            <a:schemeClr val="accent1"/>
+          </a:fillRef>
+          <a:effectRef idx="2">
+            <a:schemeClr val="accent1"/>
+          </a:effectRef>
+          <a:fontRef idx="minor">
+            <a:schemeClr val="lt1"/>
+          </a:fontRef>
+        </p:style>
+        <p:txBody>
+          <a:bodyPr rtlCol="0" anchor="ctr"/>
+          <a:lstStyle/>
+          <a:p>
+            <a:pPr algn="ctr"/>
+          </a:p>
+        </p:txBody>
+      </p:sp>
+      <p:sp>
+        <p:nvSpPr>
+          <p:cNvPr id="3" name="Rectangle 2"/>
+          <p:cNvSpPr/>
+          <p:nvPr/>
+        </p:nvSpPr>
+        <p:spPr>
+          <a:xfrm>
+            <a:off x="0" y="0"/>
+            <a:ext cx="12191695" cy="868680"/>
           </a:xfrm>
           <a:prstGeom prst="rect">
             <a:avLst/>
@@ -4072,32 +5015,127 @@
           </a:fontRef>
         </p:style>
         <p:txBody>
-          <a:bodyPr rtlCol="0" anchor="ctr" lIns="365760" tIns="228600"/>
+          <a:bodyPr rtlCol="0" anchor="ctr" wrap="square" lIns="411480" tIns="201168" rIns="1097280"/>
           <a:lstStyle/>
           <a:p>
             <a:pPr algn="l"/>
             <a:r>
-              <a:rPr sz="2600" b="1">
+              <a:rPr sz="2400" b="1">
                 <a:solidFill>
                   <a:srgbClr val="FFFFFF"/>
                 </a:solidFill>
                 <a:latin typeface="Calibri"/>
               </a:rPr>
-              <a:t>2 · Cleaning &amp; integration — clocks and joins</a:t>
-            </a:r>
-          </a:p>
-        </p:txBody>
-      </p:sp>
-      <p:sp>
-        <p:nvSpPr>
-          <p:cNvPr id="3" name="TextBox 2"/>
+              <a:t>2  ·  Cleaning &amp; integration — clocks and joins</a:t>
+            </a:r>
+          </a:p>
+        </p:txBody>
+      </p:sp>
+      <p:sp>
+        <p:nvSpPr>
+          <p:cNvPr id="4" name="Rectangle 3"/>
+          <p:cNvSpPr/>
+          <p:nvPr/>
+        </p:nvSpPr>
+        <p:spPr>
+          <a:xfrm>
+            <a:off x="0" y="868680"/>
+            <a:ext cx="12191695" cy="73152"/>
+          </a:xfrm>
+          <a:prstGeom prst="rect">
+            <a:avLst/>
+          </a:prstGeom>
+          <a:solidFill>
+            <a:srgbClr val="0072B2"/>
+          </a:solidFill>
+          <a:ln>
+            <a:noFill/>
+          </a:ln>
+        </p:spPr>
+        <p:style>
+          <a:lnRef idx="1">
+            <a:schemeClr val="accent1"/>
+          </a:lnRef>
+          <a:fillRef idx="3">
+            <a:schemeClr val="accent1"/>
+          </a:fillRef>
+          <a:effectRef idx="2">
+            <a:schemeClr val="accent1"/>
+          </a:effectRef>
+          <a:fontRef idx="minor">
+            <a:schemeClr val="lt1"/>
+          </a:fontRef>
+        </p:style>
+        <p:txBody>
+          <a:bodyPr rtlCol="0" anchor="ctr"/>
+          <a:lstStyle/>
+          <a:p>
+            <a:pPr algn="ctr"/>
+          </a:p>
+        </p:txBody>
+      </p:sp>
+      <p:sp>
+        <p:nvSpPr>
+          <p:cNvPr id="5" name="Rounded Rectangle 4"/>
+          <p:cNvSpPr/>
+          <p:nvPr/>
+        </p:nvSpPr>
+        <p:spPr>
+          <a:xfrm>
+            <a:off x="11109960" y="256032"/>
+            <a:ext cx="777240" cy="365760"/>
+          </a:xfrm>
+          <a:prstGeom prst="roundRect">
+            <a:avLst/>
+          </a:prstGeom>
+          <a:solidFill>
+            <a:srgbClr val="0072B2"/>
+          </a:solidFill>
+          <a:ln>
+            <a:noFill/>
+          </a:ln>
+        </p:spPr>
+        <p:style>
+          <a:lnRef idx="1">
+            <a:schemeClr val="accent1"/>
+          </a:lnRef>
+          <a:fillRef idx="3">
+            <a:schemeClr val="accent1"/>
+          </a:fillRef>
+          <a:effectRef idx="2">
+            <a:schemeClr val="accent1"/>
+          </a:effectRef>
+          <a:fontRef idx="minor">
+            <a:schemeClr val="lt1"/>
+          </a:fontRef>
+        </p:style>
+        <p:txBody>
+          <a:bodyPr rtlCol="0" anchor="ctr"/>
+          <a:lstStyle/>
+          <a:p>
+            <a:pPr algn="ctr"/>
+            <a:r>
+              <a:rPr sz="1200" b="1">
+                <a:solidFill>
+                  <a:srgbClr val="FFFFFF"/>
+                </a:solidFill>
+                <a:latin typeface="Calibri"/>
+              </a:rPr>
+              <a:t>2/5</a:t>
+            </a:r>
+          </a:p>
+        </p:txBody>
+      </p:sp>
+      <p:sp>
+        <p:nvSpPr>
+          <p:cNvPr id="6" name="TextBox 5"/>
           <p:cNvSpPr txBox="1"/>
           <p:nvPr/>
         </p:nvSpPr>
         <p:spPr>
           <a:xfrm>
-            <a:off x="411480" y="1188720"/>
-            <a:ext cx="5852160" cy="5303520"/>
+            <a:off x="457200" y="1143000"/>
+            <a:ext cx="5486400" cy="4937760"/>
           </a:xfrm>
           <a:prstGeom prst="rect">
             <a:avLst/>
@@ -4112,13 +5150,13 @@
           <a:p>
             <a:pPr>
               <a:spcAft>
-                <a:spcPts val="800"/>
+                <a:spcPts val="1000"/>
               </a:spcAft>
             </a:pPr>
             <a:r>
-              <a:rPr sz="1700" b="0">
-                <a:solidFill>
-                  <a:srgbClr val="222222"/>
+              <a:rPr sz="1600" b="0">
+                <a:solidFill>
+                  <a:srgbClr val="1A1A1A"/>
                 </a:solidFill>
                 <a:latin typeface="Calibri"/>
               </a:rPr>
@@ -4128,77 +5166,77 @@
           <a:p>
             <a:pPr>
               <a:spcAft>
-                <a:spcPts val="800"/>
+                <a:spcPts val="1000"/>
               </a:spcAft>
             </a:pPr>
             <a:r>
-              <a:rPr sz="1700" b="0">
-                <a:solidFill>
-                  <a:srgbClr val="222222"/>
+              <a:rPr sz="1600" b="0">
+                <a:solidFill>
+                  <a:srgbClr val="1A1A1A"/>
                 </a:solidFill>
                 <a:latin typeface="Calibri"/>
               </a:rPr>
-              <a:t>•  Clock proof: trips are EAT (+03); weather is mostly UTC (Z)</a:t>
+              <a:t>•  Clock proof: trips are EAT (+03); weather mostly UTC (Z)</a:t>
             </a:r>
           </a:p>
           <a:p>
             <a:pPr>
               <a:spcAft>
-                <a:spcPts val="800"/>
+                <a:spcPts val="1000"/>
               </a:spcAft>
             </a:pPr>
             <a:r>
-              <a:rPr sz="1700" b="0">
-                <a:solidFill>
-                  <a:srgbClr val="222222"/>
+              <a:rPr sz="1600" b="0">
+                <a:solidFill>
+                  <a:srgbClr val="1A1A1A"/>
                 </a:solidFill>
                 <a:latin typeface="Calibri"/>
               </a:rPr>
-              <a:t>•  Convert weather UTC→Africa/Addis_Ababa before join</a:t>
+              <a:t>•  Convert weather UTC → Africa/Addis_Ababa before join</a:t>
             </a:r>
           </a:p>
           <a:p>
             <a:pPr>
               <a:spcAft>
-                <a:spcPts val="800"/>
+                <a:spcPts val="1000"/>
               </a:spcAft>
             </a:pPr>
             <a:r>
-              <a:rPr sz="1700" b="0">
-                <a:solidFill>
-                  <a:srgbClr val="222222"/>
+              <a:rPr sz="1600" b="0">
+                <a:solidFill>
+                  <a:srgbClr val="1A1A1A"/>
                 </a:solidFill>
                 <a:latin typeface="Calibri"/>
               </a:rPr>
-              <a:t>•  Weather join: many-to-one on hour — match rate 100% after hourly spine</a:t>
+              <a:t>•  Weather join: many-to-one on hour — 100% match after hourly spine</a:t>
             </a:r>
           </a:p>
           <a:p>
             <a:pPr>
               <a:spcAft>
-                <a:spcPts val="800"/>
+                <a:spcPts val="1000"/>
               </a:spcAft>
             </a:pPr>
             <a:r>
-              <a:rPr sz="1700" b="0">
-                <a:solidFill>
-                  <a:srgbClr val="222222"/>
+              <a:rPr sz="1600" b="0">
+                <a:solidFill>
+                  <a:srgbClr val="1A1A1A"/>
                 </a:solidFill>
                 <a:latin typeface="Calibri"/>
               </a:rPr>
-              <a:t>•  Events: interval join; football/concert ±2h; confirmed only (159 matched)</a:t>
+              <a:t>•  Events: interval join; football/concert ±2h; confirmed only (159)</a:t>
             </a:r>
           </a:p>
           <a:p>
             <a:pPr>
               <a:spcAft>
-                <a:spcPts val="800"/>
+                <a:spcPts val="1000"/>
               </a:spcAft>
             </a:pPr>
             <a:r>
-              <a:rPr sz="1700" b="0">
-                <a:solidFill>
-                  <a:srgbClr val="222222"/>
+              <a:rPr sz="1600" b="0">
+                <a:solidFill>
+                  <a:srgbClr val="1A1A1A"/>
                 </a:solidFill>
                 <a:latin typeface="Calibri"/>
               </a:rPr>
@@ -4209,7 +5247,7 @@
       </p:sp>
       <p:pic>
         <p:nvPicPr>
-          <p:cNvPr id="4" name="Picture 3" descr="fig06_weather_timezone_check.png"/>
+          <p:cNvPr id="7" name="Picture 6" descr="fig06_weather_timezone_check.png"/>
           <p:cNvPicPr>
             <a:picLocks noChangeAspect="1"/>
           </p:cNvPicPr>
@@ -4223,14 +5261,91 @@
         </p:blipFill>
         <p:spPr>
           <a:xfrm>
-            <a:off x="6400800" y="1234440"/>
-            <a:ext cx="5394960" cy="2332956"/>
+            <a:off x="6126480" y="1188720"/>
+            <a:ext cx="5577840" cy="2412038"/>
           </a:xfrm>
           <a:prstGeom prst="rect">
             <a:avLst/>
           </a:prstGeom>
         </p:spPr>
       </p:pic>
+      <p:sp>
+        <p:nvSpPr>
+          <p:cNvPr id="8" name="Rectangle 7"/>
+          <p:cNvSpPr/>
+          <p:nvPr/>
+        </p:nvSpPr>
+        <p:spPr>
+          <a:xfrm>
+            <a:off x="411480" y="6446520"/>
+            <a:ext cx="11338560" cy="13716"/>
+          </a:xfrm>
+          <a:prstGeom prst="rect">
+            <a:avLst/>
+          </a:prstGeom>
+          <a:solidFill>
+            <a:srgbClr val="D0D7DE"/>
+          </a:solidFill>
+          <a:ln>
+            <a:noFill/>
+          </a:ln>
+        </p:spPr>
+        <p:style>
+          <a:lnRef idx="1">
+            <a:schemeClr val="accent1"/>
+          </a:lnRef>
+          <a:fillRef idx="3">
+            <a:schemeClr val="accent1"/>
+          </a:fillRef>
+          <a:effectRef idx="2">
+            <a:schemeClr val="accent1"/>
+          </a:effectRef>
+          <a:fontRef idx="minor">
+            <a:schemeClr val="lt1"/>
+          </a:fontRef>
+        </p:style>
+        <p:txBody>
+          <a:bodyPr rtlCol="0" anchor="ctr"/>
+          <a:lstStyle/>
+          <a:p>
+            <a:pPr algn="ctr"/>
+          </a:p>
+        </p:txBody>
+      </p:sp>
+      <p:sp>
+        <p:nvSpPr>
+          <p:cNvPr id="9" name="TextBox 8"/>
+          <p:cNvSpPr txBox="1"/>
+          <p:nvPr/>
+        </p:nvSpPr>
+        <p:spPr>
+          <a:xfrm>
+            <a:off x="411480" y="6492240"/>
+            <a:ext cx="11338560" cy="320040"/>
+          </a:xfrm>
+          <a:prstGeom prst="rect">
+            <a:avLst/>
+          </a:prstGeom>
+          <a:noFill/>
+        </p:spPr>
+        <p:txBody>
+          <a:bodyPr wrap="none">
+            <a:spAutoFit/>
+          </a:bodyPr>
+          <a:lstStyle/>
+          <a:p>
+            <a:r>
+              <a:rPr sz="1100" b="0">
+                <a:solidFill>
+                  <a:srgbClr val="5A5A5A"/>
+                </a:solidFill>
+                <a:latin typeface="Calibri"/>
+              </a:rPr>
+              <a:t>Addis Demand AI  ·  IDAE · EDI-Qiyas-CoDiST Advanced Digital Skills Program  ·  2/5</a:t>
+            </a:r>
+          </a:p>
+        </p:txBody>
+      </p:sp>
     </p:spTree>
   </p:cSld>
   <p:clrMapOvr>
@@ -4258,7 +5373,50 @@
         <p:spPr>
           <a:xfrm>
             <a:off x="0" y="0"/>
-            <a:ext cx="12191695" cy="960120"/>
+            <a:ext cx="12191695" cy="6858000"/>
+          </a:xfrm>
+          <a:prstGeom prst="rect">
+            <a:avLst/>
+          </a:prstGeom>
+          <a:solidFill>
+            <a:srgbClr val="F4F7FA"/>
+          </a:solidFill>
+          <a:ln>
+            <a:noFill/>
+          </a:ln>
+        </p:spPr>
+        <p:style>
+          <a:lnRef idx="1">
+            <a:schemeClr val="accent1"/>
+          </a:lnRef>
+          <a:fillRef idx="3">
+            <a:schemeClr val="accent1"/>
+          </a:fillRef>
+          <a:effectRef idx="2">
+            <a:schemeClr val="accent1"/>
+          </a:effectRef>
+          <a:fontRef idx="minor">
+            <a:schemeClr val="lt1"/>
+          </a:fontRef>
+        </p:style>
+        <p:txBody>
+          <a:bodyPr rtlCol="0" anchor="ctr"/>
+          <a:lstStyle/>
+          <a:p>
+            <a:pPr algn="ctr"/>
+          </a:p>
+        </p:txBody>
+      </p:sp>
+      <p:sp>
+        <p:nvSpPr>
+          <p:cNvPr id="3" name="Rectangle 2"/>
+          <p:cNvSpPr/>
+          <p:nvPr/>
+        </p:nvSpPr>
+        <p:spPr>
+          <a:xfrm>
+            <a:off x="0" y="0"/>
+            <a:ext cx="12191695" cy="868680"/>
           </a:xfrm>
           <a:prstGeom prst="rect">
             <a:avLst/>
@@ -4285,32 +5443,215 @@
           </a:fontRef>
         </p:style>
         <p:txBody>
-          <a:bodyPr rtlCol="0" anchor="ctr" lIns="365760" tIns="228600"/>
+          <a:bodyPr rtlCol="0" anchor="ctr" wrap="square" lIns="411480" tIns="201168" rIns="1097280"/>
           <a:lstStyle/>
           <a:p>
             <a:pPr algn="l"/>
             <a:r>
-              <a:rPr sz="2600" b="1">
+              <a:rPr sz="2400" b="1">
                 <a:solidFill>
                   <a:srgbClr val="FFFFFF"/>
                 </a:solidFill>
                 <a:latin typeface="Calibri"/>
               </a:rPr>
-              <a:t>3 · What the data says — two findings</a:t>
-            </a:r>
-          </a:p>
-        </p:txBody>
-      </p:sp>
-      <p:sp>
-        <p:nvSpPr>
-          <p:cNvPr id="3" name="TextBox 2"/>
+              <a:t>3  ·  What the data says — two findings</a:t>
+            </a:r>
+          </a:p>
+        </p:txBody>
+      </p:sp>
+      <p:sp>
+        <p:nvSpPr>
+          <p:cNvPr id="4" name="Rectangle 3"/>
+          <p:cNvSpPr/>
+          <p:nvPr/>
+        </p:nvSpPr>
+        <p:spPr>
+          <a:xfrm>
+            <a:off x="0" y="868680"/>
+            <a:ext cx="12191695" cy="73152"/>
+          </a:xfrm>
+          <a:prstGeom prst="rect">
+            <a:avLst/>
+          </a:prstGeom>
+          <a:solidFill>
+            <a:srgbClr val="0072B2"/>
+          </a:solidFill>
+          <a:ln>
+            <a:noFill/>
+          </a:ln>
+        </p:spPr>
+        <p:style>
+          <a:lnRef idx="1">
+            <a:schemeClr val="accent1"/>
+          </a:lnRef>
+          <a:fillRef idx="3">
+            <a:schemeClr val="accent1"/>
+          </a:fillRef>
+          <a:effectRef idx="2">
+            <a:schemeClr val="accent1"/>
+          </a:effectRef>
+          <a:fontRef idx="minor">
+            <a:schemeClr val="lt1"/>
+          </a:fontRef>
+        </p:style>
+        <p:txBody>
+          <a:bodyPr rtlCol="0" anchor="ctr"/>
+          <a:lstStyle/>
+          <a:p>
+            <a:pPr algn="ctr"/>
+          </a:p>
+        </p:txBody>
+      </p:sp>
+      <p:sp>
+        <p:nvSpPr>
+          <p:cNvPr id="5" name="Rounded Rectangle 4"/>
+          <p:cNvSpPr/>
+          <p:nvPr/>
+        </p:nvSpPr>
+        <p:spPr>
+          <a:xfrm>
+            <a:off x="11109960" y="256032"/>
+            <a:ext cx="777240" cy="365760"/>
+          </a:xfrm>
+          <a:prstGeom prst="roundRect">
+            <a:avLst/>
+          </a:prstGeom>
+          <a:solidFill>
+            <a:srgbClr val="0072B2"/>
+          </a:solidFill>
+          <a:ln>
+            <a:noFill/>
+          </a:ln>
+        </p:spPr>
+        <p:style>
+          <a:lnRef idx="1">
+            <a:schemeClr val="accent1"/>
+          </a:lnRef>
+          <a:fillRef idx="3">
+            <a:schemeClr val="accent1"/>
+          </a:fillRef>
+          <a:effectRef idx="2">
+            <a:schemeClr val="accent1"/>
+          </a:effectRef>
+          <a:fontRef idx="minor">
+            <a:schemeClr val="lt1"/>
+          </a:fontRef>
+        </p:style>
+        <p:txBody>
+          <a:bodyPr rtlCol="0" anchor="ctr"/>
+          <a:lstStyle/>
+          <a:p>
+            <a:pPr algn="ctr"/>
+            <a:r>
+              <a:rPr sz="1200" b="1">
+                <a:solidFill>
+                  <a:srgbClr val="FFFFFF"/>
+                </a:solidFill>
+                <a:latin typeface="Calibri"/>
+              </a:rPr>
+              <a:t>3/5</a:t>
+            </a:r>
+          </a:p>
+        </p:txBody>
+      </p:sp>
+      <p:sp>
+        <p:nvSpPr>
+          <p:cNvPr id="6" name="Rounded Rectangle 5"/>
+          <p:cNvSpPr/>
+          <p:nvPr/>
+        </p:nvSpPr>
+        <p:spPr>
+          <a:xfrm>
+            <a:off x="457200" y="1097280"/>
+            <a:ext cx="5486400" cy="1234440"/>
+          </a:xfrm>
+          <a:prstGeom prst="roundRect">
+            <a:avLst/>
+          </a:prstGeom>
+          <a:solidFill>
+            <a:srgbClr val="FFFFFF"/>
+          </a:solidFill>
+          <a:ln w="12700">
+            <a:solidFill>
+              <a:srgbClr val="D0D7DE"/>
+            </a:solidFill>
+          </a:ln>
+        </p:spPr>
+        <p:style>
+          <a:lnRef idx="1">
+            <a:schemeClr val="accent1"/>
+          </a:lnRef>
+          <a:fillRef idx="3">
+            <a:schemeClr val="accent1"/>
+          </a:fillRef>
+          <a:effectRef idx="2">
+            <a:schemeClr val="accent1"/>
+          </a:effectRef>
+          <a:fontRef idx="minor">
+            <a:schemeClr val="lt1"/>
+          </a:fontRef>
+        </p:style>
+        <p:txBody>
+          <a:bodyPr rtlCol="0" anchor="ctr"/>
+          <a:lstStyle/>
+          <a:p>
+            <a:pPr algn="ctr"/>
+          </a:p>
+        </p:txBody>
+      </p:sp>
+      <p:sp>
+        <p:nvSpPr>
+          <p:cNvPr id="7" name="Rectangle 6"/>
+          <p:cNvSpPr/>
+          <p:nvPr/>
+        </p:nvSpPr>
+        <p:spPr>
+          <a:xfrm>
+            <a:off x="457200" y="1097280"/>
+            <a:ext cx="73152" cy="1234440"/>
+          </a:xfrm>
+          <a:prstGeom prst="rect">
+            <a:avLst/>
+          </a:prstGeom>
+          <a:solidFill>
+            <a:srgbClr val="0072B2"/>
+          </a:solidFill>
+          <a:ln>
+            <a:noFill/>
+          </a:ln>
+        </p:spPr>
+        <p:style>
+          <a:lnRef idx="1">
+            <a:schemeClr val="accent1"/>
+          </a:lnRef>
+          <a:fillRef idx="3">
+            <a:schemeClr val="accent1"/>
+          </a:fillRef>
+          <a:effectRef idx="2">
+            <a:schemeClr val="accent1"/>
+          </a:effectRef>
+          <a:fontRef idx="minor">
+            <a:schemeClr val="lt1"/>
+          </a:fontRef>
+        </p:style>
+        <p:txBody>
+          <a:bodyPr rtlCol="0" anchor="ctr"/>
+          <a:lstStyle/>
+          <a:p>
+            <a:pPr algn="ctr"/>
+          </a:p>
+        </p:txBody>
+      </p:sp>
+      <p:sp>
+        <p:nvSpPr>
+          <p:cNvPr id="8" name="TextBox 7"/>
           <p:cNvSpPr txBox="1"/>
           <p:nvPr/>
         </p:nvSpPr>
         <p:spPr>
           <a:xfrm>
-            <a:off x="365760" y="1143000"/>
-            <a:ext cx="5303520" cy="2011680"/>
+            <a:off x="640080" y="1261872"/>
+            <a:ext cx="5212080" cy="1005840"/>
           </a:xfrm>
           <a:prstGeom prst="rect">
             <a:avLst/>
@@ -4323,42 +5664,204 @@
           </a:bodyPr>
           <a:lstStyle/>
           <a:p>
-            <a:pPr>
+            <a:r>
+              <a:rPr sz="2600" b="1">
+                <a:solidFill>
+                  <a:srgbClr val="0B3D5C"/>
+                </a:solidFill>
+                <a:latin typeface="Calibri"/>
+              </a:rPr>
+              <a:t>~30% growth Jan→Oct</a:t>
+            </a:r>
+          </a:p>
+          <a:p>
+            <a:r>
+              <a:rPr sz="1200" b="0">
+                <a:solidFill>
+                  <a:srgbClr val="5A5A5A"/>
+                </a:solidFill>
+                <a:latin typeface="Calibri"/>
+              </a:rPr>
+              <a:t>November needs trend + lags — not seasonality alone</a:t>
+            </a:r>
+          </a:p>
+        </p:txBody>
+      </p:sp>
+      <p:sp>
+        <p:nvSpPr>
+          <p:cNvPr id="9" name="Rounded Rectangle 8"/>
+          <p:cNvSpPr/>
+          <p:nvPr/>
+        </p:nvSpPr>
+        <p:spPr>
+          <a:xfrm>
+            <a:off x="6217920" y="1097280"/>
+            <a:ext cx="5486400" cy="1234440"/>
+          </a:xfrm>
+          <a:prstGeom prst="roundRect">
+            <a:avLst/>
+          </a:prstGeom>
+          <a:solidFill>
+            <a:srgbClr val="FFFFFF"/>
+          </a:solidFill>
+          <a:ln w="12700">
+            <a:solidFill>
+              <a:srgbClr val="D0D7DE"/>
+            </a:solidFill>
+          </a:ln>
+        </p:spPr>
+        <p:style>
+          <a:lnRef idx="1">
+            <a:schemeClr val="accent1"/>
+          </a:lnRef>
+          <a:fillRef idx="3">
+            <a:schemeClr val="accent1"/>
+          </a:fillRef>
+          <a:effectRef idx="2">
+            <a:schemeClr val="accent1"/>
+          </a:effectRef>
+          <a:fontRef idx="minor">
+            <a:schemeClr val="lt1"/>
+          </a:fontRef>
+        </p:style>
+        <p:txBody>
+          <a:bodyPr rtlCol="0" anchor="ctr"/>
+          <a:lstStyle/>
+          <a:p>
+            <a:pPr algn="ctr"/>
+          </a:p>
+        </p:txBody>
+      </p:sp>
+      <p:sp>
+        <p:nvSpPr>
+          <p:cNvPr id="10" name="Rectangle 9"/>
+          <p:cNvSpPr/>
+          <p:nvPr/>
+        </p:nvSpPr>
+        <p:spPr>
+          <a:xfrm>
+            <a:off x="6217920" y="1097280"/>
+            <a:ext cx="73152" cy="1234440"/>
+          </a:xfrm>
+          <a:prstGeom prst="rect">
+            <a:avLst/>
+          </a:prstGeom>
+          <a:solidFill>
+            <a:srgbClr val="009E73"/>
+          </a:solidFill>
+          <a:ln>
+            <a:noFill/>
+          </a:ln>
+        </p:spPr>
+        <p:style>
+          <a:lnRef idx="1">
+            <a:schemeClr val="accent1"/>
+          </a:lnRef>
+          <a:fillRef idx="3">
+            <a:schemeClr val="accent1"/>
+          </a:fillRef>
+          <a:effectRef idx="2">
+            <a:schemeClr val="accent1"/>
+          </a:effectRef>
+          <a:fontRef idx="minor">
+            <a:schemeClr val="lt1"/>
+          </a:fontRef>
+        </p:style>
+        <p:txBody>
+          <a:bodyPr rtlCol="0" anchor="ctr"/>
+          <a:lstStyle/>
+          <a:p>
+            <a:pPr algn="ctr"/>
+          </a:p>
+        </p:txBody>
+      </p:sp>
+      <p:sp>
+        <p:nvSpPr>
+          <p:cNvPr id="11" name="TextBox 10"/>
+          <p:cNvSpPr txBox="1"/>
+          <p:nvPr/>
+        </p:nvSpPr>
+        <p:spPr>
+          <a:xfrm>
+            <a:off x="6400800" y="1261872"/>
+            <a:ext cx="5212080" cy="1005840"/>
+          </a:xfrm>
+          <a:prstGeom prst="rect">
+            <a:avLst/>
+          </a:prstGeom>
+          <a:noFill/>
+        </p:spPr>
+        <p:txBody>
+          <a:bodyPr wrap="square">
+            <a:spAutoFit/>
+          </a:bodyPr>
+          <a:lstStyle/>
+          <a:p>
+            <a:r>
+              <a:rPr sz="2600" b="1">
+                <a:solidFill>
+                  <a:srgbClr val="0B3D5C"/>
+                </a:solidFill>
+                <a:latin typeface="Calibri"/>
+              </a:rPr>
+              <a:t>~2.7× pre-kickoff</a:t>
+            </a:r>
+          </a:p>
+          <a:p>
+            <a:r>
+              <a:rPr sz="1200" b="0">
+                <a:solidFill>
+                  <a:srgbClr val="5A5A5A"/>
+                </a:solidFill>
+                <a:latin typeface="Calibri"/>
+              </a:rPr>
+              <a:t>Football uplift in stadium zones (supports ±2h windows)</a:t>
+            </a:r>
+          </a:p>
+        </p:txBody>
+      </p:sp>
+      <p:sp>
+        <p:nvSpPr>
+          <p:cNvPr id="12" name="TextBox 11"/>
+          <p:cNvSpPr txBox="1"/>
+          <p:nvPr/>
+        </p:nvSpPr>
+        <p:spPr>
+          <a:xfrm>
+            <a:off x="457200" y="2468880"/>
+            <a:ext cx="11247120" cy="365760"/>
+          </a:xfrm>
+          <a:prstGeom prst="rect">
+            <a:avLst/>
+          </a:prstGeom>
+          <a:noFill/>
+        </p:spPr>
+        <p:txBody>
+          <a:bodyPr wrap="square">
+            <a:spAutoFit/>
+          </a:bodyPr>
+          <a:lstStyle/>
+          <a:p>
+            <a:pPr algn="l">
               <a:spcAft>
-                <a:spcPts val="800"/>
+                <a:spcPts val="400"/>
               </a:spcAft>
             </a:pPr>
             <a:r>
-              <a:rPr sz="1600" b="0">
-                <a:solidFill>
-                  <a:srgbClr val="222222"/>
+              <a:rPr sz="1300" b="0">
+                <a:solidFill>
+                  <a:srgbClr val="5A5A5A"/>
                 </a:solidFill>
                 <a:latin typeface="Calibri"/>
               </a:rPr>
-              <a:t>•  ① Demand grew ~30% Jan→Oct — November needs trend/lags, not only seasonality</a:t>
-            </a:r>
-          </a:p>
-          <a:p>
-            <a:pPr>
-              <a:spcAft>
-                <a:spcPts val="800"/>
-              </a:spcAft>
-            </a:pPr>
-            <a:r>
-              <a:rPr sz="1600" b="0">
-                <a:solidFill>
-                  <a:srgbClr val="222222"/>
-                </a:solidFill>
-                <a:latin typeface="Calibri"/>
-              </a:rPr>
-              <a:t>•  ② Football: largest uplift in the 2 hours before kickoff (~2.7× baseline in stadium zones)</a:t>
+              <a:t>Also: Ayat is late-launch (short history) · rain effects differ by zone type · cancelled events excluded</a:t>
             </a:r>
           </a:p>
         </p:txBody>
       </p:sp>
       <p:pic>
         <p:nvPicPr>
-          <p:cNvPr id="4" name="Picture 3" descr="fig03_demand_trend_with_holidays.png"/>
+          <p:cNvPr id="13" name="Picture 12" descr="fig03_demand_trend_with_holidays.png"/>
           <p:cNvPicPr>
             <a:picLocks noChangeAspect="1"/>
           </p:cNvPicPr>
@@ -4372,8 +5875,8 @@
         </p:blipFill>
         <p:spPr>
           <a:xfrm>
-            <a:off x="320040" y="3200400"/>
-            <a:ext cx="5669280" cy="2317510"/>
+            <a:off x="365760" y="2926080"/>
+            <a:ext cx="5669280" cy="2317509"/>
           </a:xfrm>
           <a:prstGeom prst="rect">
             <a:avLst/>
@@ -4382,7 +5885,7 @@
       </p:pic>
       <p:pic>
         <p:nvPicPr>
-          <p:cNvPr id="5" name="Picture 4" descr="fig08_event_study.png"/>
+          <p:cNvPr id="14" name="Picture 13" descr="fig08_event_study.png"/>
           <p:cNvPicPr>
             <a:picLocks noChangeAspect="1"/>
           </p:cNvPicPr>
@@ -4396,8 +5899,8 @@
         </p:blipFill>
         <p:spPr>
           <a:xfrm>
-            <a:off x="6126480" y="3200400"/>
-            <a:ext cx="5669280" cy="2451581"/>
+            <a:off x="6217920" y="2926080"/>
+            <a:ext cx="5577840" cy="2412038"/>
           </a:xfrm>
           <a:prstGeom prst="rect">
             <a:avLst/>
@@ -4406,14 +5909,57 @@
       </p:pic>
       <p:sp>
         <p:nvSpPr>
-          <p:cNvPr id="6" name="TextBox 5"/>
+          <p:cNvPr id="15" name="Rectangle 14"/>
+          <p:cNvSpPr/>
+          <p:nvPr/>
+        </p:nvSpPr>
+        <p:spPr>
+          <a:xfrm>
+            <a:off x="411480" y="6446520"/>
+            <a:ext cx="11338560" cy="13716"/>
+          </a:xfrm>
+          <a:prstGeom prst="rect">
+            <a:avLst/>
+          </a:prstGeom>
+          <a:solidFill>
+            <a:srgbClr val="D0D7DE"/>
+          </a:solidFill>
+          <a:ln>
+            <a:noFill/>
+          </a:ln>
+        </p:spPr>
+        <p:style>
+          <a:lnRef idx="1">
+            <a:schemeClr val="accent1"/>
+          </a:lnRef>
+          <a:fillRef idx="3">
+            <a:schemeClr val="accent1"/>
+          </a:fillRef>
+          <a:effectRef idx="2">
+            <a:schemeClr val="accent1"/>
+          </a:effectRef>
+          <a:fontRef idx="minor">
+            <a:schemeClr val="lt1"/>
+          </a:fontRef>
+        </p:style>
+        <p:txBody>
+          <a:bodyPr rtlCol="0" anchor="ctr"/>
+          <a:lstStyle/>
+          <a:p>
+            <a:pPr algn="ctr"/>
+          </a:p>
+        </p:txBody>
+      </p:sp>
+      <p:sp>
+        <p:nvSpPr>
+          <p:cNvPr id="16" name="TextBox 15"/>
           <p:cNvSpPr txBox="1"/>
           <p:nvPr/>
         </p:nvSpPr>
         <p:spPr>
           <a:xfrm>
-            <a:off x="5943600" y="1188720"/>
-            <a:ext cx="5852160" cy="1828800"/>
+            <a:off x="411480" y="6492240"/>
+            <a:ext cx="11338560" cy="320040"/>
           </a:xfrm>
           <a:prstGeom prst="rect">
             <a:avLst/>
@@ -4421,56 +5967,19 @@
           <a:noFill/>
         </p:spPr>
         <p:txBody>
-          <a:bodyPr wrap="square">
+          <a:bodyPr wrap="none">
             <a:spAutoFit/>
           </a:bodyPr>
           <a:lstStyle/>
           <a:p>
-            <a:pPr>
-              <a:spcAft>
-                <a:spcPts val="600"/>
-              </a:spcAft>
-            </a:pPr>
-            <a:r>
-              <a:rPr sz="1400" b="0">
-                <a:solidFill>
-                  <a:srgbClr val="555555"/>
+            <a:r>
+              <a:rPr sz="1100" b="0">
+                <a:solidFill>
+                  <a:srgbClr val="5A5A5A"/>
                 </a:solidFill>
                 <a:latin typeface="Calibri"/>
               </a:rPr>
-              <a:t>Also: Ayat is a late-launch zone (shorter history).</a:t>
-            </a:r>
-          </a:p>
-          <a:p>
-            <a:pPr>
-              <a:spcAft>
-                <a:spcPts val="600"/>
-              </a:spcAft>
-            </a:pPr>
-            <a:r>
-              <a:rPr sz="1400" b="0">
-                <a:solidFill>
-                  <a:srgbClr val="555555"/>
-                </a:solidFill>
-                <a:latin typeface="Calibri"/>
-              </a:rPr>
-              <a:t>Rain lifts demand unevenly by zone type.</a:t>
-            </a:r>
-          </a:p>
-          <a:p>
-            <a:pPr>
-              <a:spcAft>
-                <a:spcPts val="600"/>
-              </a:spcAft>
-            </a:pPr>
-            <a:r>
-              <a:rPr sz="1400" b="0">
-                <a:solidFill>
-                  <a:srgbClr val="555555"/>
-                </a:solidFill>
-                <a:latin typeface="Calibri"/>
-              </a:rPr>
-              <a:t>Cancelled events excluded from features.</a:t>
+              <a:t>Addis Demand AI  ·  IDAE · EDI-Qiyas-CoDiST Advanced Digital Skills Program  ·  3/5</a:t>
             </a:r>
           </a:p>
         </p:txBody>
@@ -4502,7 +6011,50 @@
         <p:spPr>
           <a:xfrm>
             <a:off x="0" y="0"/>
-            <a:ext cx="12191695" cy="960120"/>
+            <a:ext cx="12191695" cy="6858000"/>
+          </a:xfrm>
+          <a:prstGeom prst="rect">
+            <a:avLst/>
+          </a:prstGeom>
+          <a:solidFill>
+            <a:srgbClr val="F4F7FA"/>
+          </a:solidFill>
+          <a:ln>
+            <a:noFill/>
+          </a:ln>
+        </p:spPr>
+        <p:style>
+          <a:lnRef idx="1">
+            <a:schemeClr val="accent1"/>
+          </a:lnRef>
+          <a:fillRef idx="3">
+            <a:schemeClr val="accent1"/>
+          </a:fillRef>
+          <a:effectRef idx="2">
+            <a:schemeClr val="accent1"/>
+          </a:effectRef>
+          <a:fontRef idx="minor">
+            <a:schemeClr val="lt1"/>
+          </a:fontRef>
+        </p:style>
+        <p:txBody>
+          <a:bodyPr rtlCol="0" anchor="ctr"/>
+          <a:lstStyle/>
+          <a:p>
+            <a:pPr algn="ctr"/>
+          </a:p>
+        </p:txBody>
+      </p:sp>
+      <p:sp>
+        <p:nvSpPr>
+          <p:cNvPr id="3" name="Rectangle 2"/>
+          <p:cNvSpPr/>
+          <p:nvPr/>
+        </p:nvSpPr>
+        <p:spPr>
+          <a:xfrm>
+            <a:off x="0" y="0"/>
+            <a:ext cx="12191695" cy="868680"/>
           </a:xfrm>
           <a:prstGeom prst="rect">
             <a:avLst/>
@@ -4529,32 +6081,215 @@
           </a:fontRef>
         </p:style>
         <p:txBody>
-          <a:bodyPr rtlCol="0" anchor="ctr" lIns="365760" tIns="228600"/>
+          <a:bodyPr rtlCol="0" anchor="ctr" wrap="square" lIns="411480" tIns="201168" rIns="1097280"/>
           <a:lstStyle/>
           <a:p>
             <a:pPr algn="l"/>
             <a:r>
-              <a:rPr sz="2600" b="1">
+              <a:rPr sz="2400" b="1">
                 <a:solidFill>
                   <a:srgbClr val="FFFFFF"/>
                 </a:solidFill>
                 <a:latin typeface="Calibri"/>
               </a:rPr>
-              <a:t>4 · Modeling &amp; evaluation — beat the seasonal baseline</a:t>
-            </a:r>
-          </a:p>
-        </p:txBody>
-      </p:sp>
-      <p:sp>
-        <p:nvSpPr>
-          <p:cNvPr id="3" name="TextBox 2"/>
+              <a:t>4  ·  Modeling — beat the seasonal baseline</a:t>
+            </a:r>
+          </a:p>
+        </p:txBody>
+      </p:sp>
+      <p:sp>
+        <p:nvSpPr>
+          <p:cNvPr id="4" name="Rectangle 3"/>
+          <p:cNvSpPr/>
+          <p:nvPr/>
+        </p:nvSpPr>
+        <p:spPr>
+          <a:xfrm>
+            <a:off x="0" y="868680"/>
+            <a:ext cx="12191695" cy="73152"/>
+          </a:xfrm>
+          <a:prstGeom prst="rect">
+            <a:avLst/>
+          </a:prstGeom>
+          <a:solidFill>
+            <a:srgbClr val="0072B2"/>
+          </a:solidFill>
+          <a:ln>
+            <a:noFill/>
+          </a:ln>
+        </p:spPr>
+        <p:style>
+          <a:lnRef idx="1">
+            <a:schemeClr val="accent1"/>
+          </a:lnRef>
+          <a:fillRef idx="3">
+            <a:schemeClr val="accent1"/>
+          </a:fillRef>
+          <a:effectRef idx="2">
+            <a:schemeClr val="accent1"/>
+          </a:effectRef>
+          <a:fontRef idx="minor">
+            <a:schemeClr val="lt1"/>
+          </a:fontRef>
+        </p:style>
+        <p:txBody>
+          <a:bodyPr rtlCol="0" anchor="ctr"/>
+          <a:lstStyle/>
+          <a:p>
+            <a:pPr algn="ctr"/>
+          </a:p>
+        </p:txBody>
+      </p:sp>
+      <p:sp>
+        <p:nvSpPr>
+          <p:cNvPr id="5" name="Rounded Rectangle 4"/>
+          <p:cNvSpPr/>
+          <p:nvPr/>
+        </p:nvSpPr>
+        <p:spPr>
+          <a:xfrm>
+            <a:off x="11109960" y="256032"/>
+            <a:ext cx="777240" cy="365760"/>
+          </a:xfrm>
+          <a:prstGeom prst="roundRect">
+            <a:avLst/>
+          </a:prstGeom>
+          <a:solidFill>
+            <a:srgbClr val="0072B2"/>
+          </a:solidFill>
+          <a:ln>
+            <a:noFill/>
+          </a:ln>
+        </p:spPr>
+        <p:style>
+          <a:lnRef idx="1">
+            <a:schemeClr val="accent1"/>
+          </a:lnRef>
+          <a:fillRef idx="3">
+            <a:schemeClr val="accent1"/>
+          </a:fillRef>
+          <a:effectRef idx="2">
+            <a:schemeClr val="accent1"/>
+          </a:effectRef>
+          <a:fontRef idx="minor">
+            <a:schemeClr val="lt1"/>
+          </a:fontRef>
+        </p:style>
+        <p:txBody>
+          <a:bodyPr rtlCol="0" anchor="ctr"/>
+          <a:lstStyle/>
+          <a:p>
+            <a:pPr algn="ctr"/>
+            <a:r>
+              <a:rPr sz="1200" b="1">
+                <a:solidFill>
+                  <a:srgbClr val="FFFFFF"/>
+                </a:solidFill>
+                <a:latin typeface="Calibri"/>
+              </a:rPr>
+              <a:t>4/5</a:t>
+            </a:r>
+          </a:p>
+        </p:txBody>
+      </p:sp>
+      <p:sp>
+        <p:nvSpPr>
+          <p:cNvPr id="6" name="Rounded Rectangle 5"/>
+          <p:cNvSpPr/>
+          <p:nvPr/>
+        </p:nvSpPr>
+        <p:spPr>
+          <a:xfrm>
+            <a:off x="411480" y="1097280"/>
+            <a:ext cx="2651760" cy="1005840"/>
+          </a:xfrm>
+          <a:prstGeom prst="roundRect">
+            <a:avLst/>
+          </a:prstGeom>
+          <a:solidFill>
+            <a:srgbClr val="FFFFFF"/>
+          </a:solidFill>
+          <a:ln w="12700">
+            <a:solidFill>
+              <a:srgbClr val="D0D7DE"/>
+            </a:solidFill>
+          </a:ln>
+        </p:spPr>
+        <p:style>
+          <a:lnRef idx="1">
+            <a:schemeClr val="accent1"/>
+          </a:lnRef>
+          <a:fillRef idx="3">
+            <a:schemeClr val="accent1"/>
+          </a:fillRef>
+          <a:effectRef idx="2">
+            <a:schemeClr val="accent1"/>
+          </a:effectRef>
+          <a:fontRef idx="minor">
+            <a:schemeClr val="lt1"/>
+          </a:fontRef>
+        </p:style>
+        <p:txBody>
+          <a:bodyPr rtlCol="0" anchor="ctr"/>
+          <a:lstStyle/>
+          <a:p>
+            <a:pPr algn="ctr"/>
+          </a:p>
+        </p:txBody>
+      </p:sp>
+      <p:sp>
+        <p:nvSpPr>
+          <p:cNvPr id="7" name="Rectangle 6"/>
+          <p:cNvSpPr/>
+          <p:nvPr/>
+        </p:nvSpPr>
+        <p:spPr>
+          <a:xfrm>
+            <a:off x="411480" y="1097280"/>
+            <a:ext cx="73152" cy="1005840"/>
+          </a:xfrm>
+          <a:prstGeom prst="rect">
+            <a:avLst/>
+          </a:prstGeom>
+          <a:solidFill>
+            <a:srgbClr val="009E73"/>
+          </a:solidFill>
+          <a:ln>
+            <a:noFill/>
+          </a:ln>
+        </p:spPr>
+        <p:style>
+          <a:lnRef idx="1">
+            <a:schemeClr val="accent1"/>
+          </a:lnRef>
+          <a:fillRef idx="3">
+            <a:schemeClr val="accent1"/>
+          </a:fillRef>
+          <a:effectRef idx="2">
+            <a:schemeClr val="accent1"/>
+          </a:effectRef>
+          <a:fontRef idx="minor">
+            <a:schemeClr val="lt1"/>
+          </a:fontRef>
+        </p:style>
+        <p:txBody>
+          <a:bodyPr rtlCol="0" anchor="ctr"/>
+          <a:lstStyle/>
+          <a:p>
+            <a:pPr algn="ctr"/>
+          </a:p>
+        </p:txBody>
+      </p:sp>
+      <p:sp>
+        <p:nvSpPr>
+          <p:cNvPr id="8" name="TextBox 7"/>
           <p:cNvSpPr txBox="1"/>
           <p:nvPr/>
         </p:nvSpPr>
         <p:spPr>
           <a:xfrm>
-            <a:off x="411480" y="1143000"/>
-            <a:ext cx="5760720" cy="5303520"/>
+            <a:off x="594360" y="1261872"/>
+            <a:ext cx="2377440" cy="777240"/>
           </a:xfrm>
           <a:prstGeom prst="rect">
             <a:avLst/>
@@ -4567,15 +6302,459 @@
           </a:bodyPr>
           <a:lstStyle/>
           <a:p>
+            <a:r>
+              <a:rPr sz="2600" b="1">
+                <a:solidFill>
+                  <a:srgbClr val="0B3D5C"/>
+                </a:solidFill>
+                <a:latin typeface="Calibri"/>
+              </a:rPr>
+              <a:t>10.16</a:t>
+            </a:r>
+          </a:p>
+          <a:p>
+            <a:r>
+              <a:rPr sz="1200" b="0">
+                <a:solidFill>
+                  <a:srgbClr val="5A5A5A"/>
+                </a:solidFill>
+                <a:latin typeface="Calibri"/>
+              </a:rPr>
+              <a:t>Tuned HistGBM RMSE</a:t>
+            </a:r>
+          </a:p>
+        </p:txBody>
+      </p:sp>
+      <p:sp>
+        <p:nvSpPr>
+          <p:cNvPr id="9" name="Rounded Rectangle 8"/>
+          <p:cNvSpPr/>
+          <p:nvPr/>
+        </p:nvSpPr>
+        <p:spPr>
+          <a:xfrm>
+            <a:off x="3200400" y="1097280"/>
+            <a:ext cx="2651760" cy="1005840"/>
+          </a:xfrm>
+          <a:prstGeom prst="roundRect">
+            <a:avLst/>
+          </a:prstGeom>
+          <a:solidFill>
+            <a:srgbClr val="FFFFFF"/>
+          </a:solidFill>
+          <a:ln w="12700">
+            <a:solidFill>
+              <a:srgbClr val="D0D7DE"/>
+            </a:solidFill>
+          </a:ln>
+        </p:spPr>
+        <p:style>
+          <a:lnRef idx="1">
+            <a:schemeClr val="accent1"/>
+          </a:lnRef>
+          <a:fillRef idx="3">
+            <a:schemeClr val="accent1"/>
+          </a:fillRef>
+          <a:effectRef idx="2">
+            <a:schemeClr val="accent1"/>
+          </a:effectRef>
+          <a:fontRef idx="minor">
+            <a:schemeClr val="lt1"/>
+          </a:fontRef>
+        </p:style>
+        <p:txBody>
+          <a:bodyPr rtlCol="0" anchor="ctr"/>
+          <a:lstStyle/>
+          <a:p>
+            <a:pPr algn="ctr"/>
+          </a:p>
+        </p:txBody>
+      </p:sp>
+      <p:sp>
+        <p:nvSpPr>
+          <p:cNvPr id="10" name="Rectangle 9"/>
+          <p:cNvSpPr/>
+          <p:nvPr/>
+        </p:nvSpPr>
+        <p:spPr>
+          <a:xfrm>
+            <a:off x="3200400" y="1097280"/>
+            <a:ext cx="73152" cy="1005840"/>
+          </a:xfrm>
+          <a:prstGeom prst="rect">
+            <a:avLst/>
+          </a:prstGeom>
+          <a:solidFill>
+            <a:srgbClr val="0072B2"/>
+          </a:solidFill>
+          <a:ln>
+            <a:noFill/>
+          </a:ln>
+        </p:spPr>
+        <p:style>
+          <a:lnRef idx="1">
+            <a:schemeClr val="accent1"/>
+          </a:lnRef>
+          <a:fillRef idx="3">
+            <a:schemeClr val="accent1"/>
+          </a:fillRef>
+          <a:effectRef idx="2">
+            <a:schemeClr val="accent1"/>
+          </a:effectRef>
+          <a:fontRef idx="minor">
+            <a:schemeClr val="lt1"/>
+          </a:fontRef>
+        </p:style>
+        <p:txBody>
+          <a:bodyPr rtlCol="0" anchor="ctr"/>
+          <a:lstStyle/>
+          <a:p>
+            <a:pPr algn="ctr"/>
+          </a:p>
+        </p:txBody>
+      </p:sp>
+      <p:sp>
+        <p:nvSpPr>
+          <p:cNvPr id="11" name="TextBox 10"/>
+          <p:cNvSpPr txBox="1"/>
+          <p:nvPr/>
+        </p:nvSpPr>
+        <p:spPr>
+          <a:xfrm>
+            <a:off x="3383280" y="1261872"/>
+            <a:ext cx="2377440" cy="777240"/>
+          </a:xfrm>
+          <a:prstGeom prst="rect">
+            <a:avLst/>
+          </a:prstGeom>
+          <a:noFill/>
+        </p:spPr>
+        <p:txBody>
+          <a:bodyPr wrap="square">
+            <a:spAutoFit/>
+          </a:bodyPr>
+          <a:lstStyle/>
+          <a:p>
+            <a:r>
+              <a:rPr sz="2600" b="1">
+                <a:solidFill>
+                  <a:srgbClr val="0B3D5C"/>
+                </a:solidFill>
+                <a:latin typeface="Calibri"/>
+              </a:rPr>
+              <a:t>12.08</a:t>
+            </a:r>
+          </a:p>
+          <a:p>
+            <a:r>
+              <a:rPr sz="1200" b="0">
+                <a:solidFill>
+                  <a:srgbClr val="5A5A5A"/>
+                </a:solidFill>
+                <a:latin typeface="Calibri"/>
+              </a:rPr>
+              <a:t>Seasonal naive RMSE</a:t>
+            </a:r>
+          </a:p>
+        </p:txBody>
+      </p:sp>
+      <p:sp>
+        <p:nvSpPr>
+          <p:cNvPr id="12" name="Rounded Rectangle 11"/>
+          <p:cNvSpPr/>
+          <p:nvPr/>
+        </p:nvSpPr>
+        <p:spPr>
+          <a:xfrm>
+            <a:off x="5989320" y="1097280"/>
+            <a:ext cx="2651760" cy="1005840"/>
+          </a:xfrm>
+          <a:prstGeom prst="roundRect">
+            <a:avLst/>
+          </a:prstGeom>
+          <a:solidFill>
+            <a:srgbClr val="FFFFFF"/>
+          </a:solidFill>
+          <a:ln w="12700">
+            <a:solidFill>
+              <a:srgbClr val="D0D7DE"/>
+            </a:solidFill>
+          </a:ln>
+        </p:spPr>
+        <p:style>
+          <a:lnRef idx="1">
+            <a:schemeClr val="accent1"/>
+          </a:lnRef>
+          <a:fillRef idx="3">
+            <a:schemeClr val="accent1"/>
+          </a:fillRef>
+          <a:effectRef idx="2">
+            <a:schemeClr val="accent1"/>
+          </a:effectRef>
+          <a:fontRef idx="minor">
+            <a:schemeClr val="lt1"/>
+          </a:fontRef>
+        </p:style>
+        <p:txBody>
+          <a:bodyPr rtlCol="0" anchor="ctr"/>
+          <a:lstStyle/>
+          <a:p>
+            <a:pPr algn="ctr"/>
+          </a:p>
+        </p:txBody>
+      </p:sp>
+      <p:sp>
+        <p:nvSpPr>
+          <p:cNvPr id="13" name="Rectangle 12"/>
+          <p:cNvSpPr/>
+          <p:nvPr/>
+        </p:nvSpPr>
+        <p:spPr>
+          <a:xfrm>
+            <a:off x="5989320" y="1097280"/>
+            <a:ext cx="73152" cy="1005840"/>
+          </a:xfrm>
+          <a:prstGeom prst="rect">
+            <a:avLst/>
+          </a:prstGeom>
+          <a:solidFill>
+            <a:srgbClr val="0072B2"/>
+          </a:solidFill>
+          <a:ln>
+            <a:noFill/>
+          </a:ln>
+        </p:spPr>
+        <p:style>
+          <a:lnRef idx="1">
+            <a:schemeClr val="accent1"/>
+          </a:lnRef>
+          <a:fillRef idx="3">
+            <a:schemeClr val="accent1"/>
+          </a:fillRef>
+          <a:effectRef idx="2">
+            <a:schemeClr val="accent1"/>
+          </a:effectRef>
+          <a:fontRef idx="minor">
+            <a:schemeClr val="lt1"/>
+          </a:fontRef>
+        </p:style>
+        <p:txBody>
+          <a:bodyPr rtlCol="0" anchor="ctr"/>
+          <a:lstStyle/>
+          <a:p>
+            <a:pPr algn="ctr"/>
+          </a:p>
+        </p:txBody>
+      </p:sp>
+      <p:sp>
+        <p:nvSpPr>
+          <p:cNvPr id="14" name="TextBox 13"/>
+          <p:cNvSpPr txBox="1"/>
+          <p:nvPr/>
+        </p:nvSpPr>
+        <p:spPr>
+          <a:xfrm>
+            <a:off x="6172200" y="1261872"/>
+            <a:ext cx="2377440" cy="777240"/>
+          </a:xfrm>
+          <a:prstGeom prst="rect">
+            <a:avLst/>
+          </a:prstGeom>
+          <a:noFill/>
+        </p:spPr>
+        <p:txBody>
+          <a:bodyPr wrap="square">
+            <a:spAutoFit/>
+          </a:bodyPr>
+          <a:lstStyle/>
+          <a:p>
+            <a:r>
+              <a:rPr sz="2600" b="1">
+                <a:solidFill>
+                  <a:srgbClr val="0B3D5C"/>
+                </a:solidFill>
+                <a:latin typeface="Calibri"/>
+              </a:rPr>
+              <a:t>11.06±0.42</a:t>
+            </a:r>
+          </a:p>
+          <a:p>
+            <a:r>
+              <a:rPr sz="1200" b="0">
+                <a:solidFill>
+                  <a:srgbClr val="5A5A5A"/>
+                </a:solidFill>
+                <a:latin typeface="Calibri"/>
+              </a:rPr>
+              <a:t>Rolling 5-fold RMSE</a:t>
+            </a:r>
+          </a:p>
+        </p:txBody>
+      </p:sp>
+      <p:sp>
+        <p:nvSpPr>
+          <p:cNvPr id="15" name="Rounded Rectangle 14"/>
+          <p:cNvSpPr/>
+          <p:nvPr/>
+        </p:nvSpPr>
+        <p:spPr>
+          <a:xfrm>
+            <a:off x="8778240" y="1097280"/>
+            <a:ext cx="2926080" cy="1005840"/>
+          </a:xfrm>
+          <a:prstGeom prst="roundRect">
+            <a:avLst/>
+          </a:prstGeom>
+          <a:solidFill>
+            <a:srgbClr val="FFFFFF"/>
+          </a:solidFill>
+          <a:ln w="12700">
+            <a:solidFill>
+              <a:srgbClr val="D0D7DE"/>
+            </a:solidFill>
+          </a:ln>
+        </p:spPr>
+        <p:style>
+          <a:lnRef idx="1">
+            <a:schemeClr val="accent1"/>
+          </a:lnRef>
+          <a:fillRef idx="3">
+            <a:schemeClr val="accent1"/>
+          </a:fillRef>
+          <a:effectRef idx="2">
+            <a:schemeClr val="accent1"/>
+          </a:effectRef>
+          <a:fontRef idx="minor">
+            <a:schemeClr val="lt1"/>
+          </a:fontRef>
+        </p:style>
+        <p:txBody>
+          <a:bodyPr rtlCol="0" anchor="ctr"/>
+          <a:lstStyle/>
+          <a:p>
+            <a:pPr algn="ctr"/>
+          </a:p>
+        </p:txBody>
+      </p:sp>
+      <p:sp>
+        <p:nvSpPr>
+          <p:cNvPr id="16" name="Rectangle 15"/>
+          <p:cNvSpPr/>
+          <p:nvPr/>
+        </p:nvSpPr>
+        <p:spPr>
+          <a:xfrm>
+            <a:off x="8778240" y="1097280"/>
+            <a:ext cx="73152" cy="1005840"/>
+          </a:xfrm>
+          <a:prstGeom prst="rect">
+            <a:avLst/>
+          </a:prstGeom>
+          <a:solidFill>
+            <a:srgbClr val="009E73"/>
+          </a:solidFill>
+          <a:ln>
+            <a:noFill/>
+          </a:ln>
+        </p:spPr>
+        <p:style>
+          <a:lnRef idx="1">
+            <a:schemeClr val="accent1"/>
+          </a:lnRef>
+          <a:fillRef idx="3">
+            <a:schemeClr val="accent1"/>
+          </a:fillRef>
+          <a:effectRef idx="2">
+            <a:schemeClr val="accent1"/>
+          </a:effectRef>
+          <a:fontRef idx="minor">
+            <a:schemeClr val="lt1"/>
+          </a:fontRef>
+        </p:style>
+        <p:txBody>
+          <a:bodyPr rtlCol="0" anchor="ctr"/>
+          <a:lstStyle/>
+          <a:p>
+            <a:pPr algn="ctr"/>
+          </a:p>
+        </p:txBody>
+      </p:sp>
+      <p:sp>
+        <p:nvSpPr>
+          <p:cNvPr id="17" name="TextBox 16"/>
+          <p:cNvSpPr txBox="1"/>
+          <p:nvPr/>
+        </p:nvSpPr>
+        <p:spPr>
+          <a:xfrm>
+            <a:off x="8961120" y="1261872"/>
+            <a:ext cx="2651760" cy="777240"/>
+          </a:xfrm>
+          <a:prstGeom prst="rect">
+            <a:avLst/>
+          </a:prstGeom>
+          <a:noFill/>
+        </p:spPr>
+        <p:txBody>
+          <a:bodyPr wrap="square">
+            <a:spAutoFit/>
+          </a:bodyPr>
+          <a:lstStyle/>
+          <a:p>
+            <a:r>
+              <a:rPr sz="2600" b="1">
+                <a:solidFill>
+                  <a:srgbClr val="0B3D5C"/>
+                </a:solidFill>
+                <a:latin typeface="Calibri"/>
+              </a:rPr>
+              <a:t>No leak</a:t>
+            </a:r>
+          </a:p>
+          <a:p>
+            <a:r>
+              <a:rPr sz="1200" b="0">
+                <a:solidFill>
+                  <a:srgbClr val="5A5A5A"/>
+                </a:solidFill>
+                <a:latin typeface="Calibri"/>
+              </a:rPr>
+              <a:t>Fare / wait / drivers out</a:t>
+            </a:r>
+          </a:p>
+        </p:txBody>
+      </p:sp>
+      <p:sp>
+        <p:nvSpPr>
+          <p:cNvPr id="18" name="TextBox 17"/>
+          <p:cNvSpPr txBox="1"/>
+          <p:nvPr/>
+        </p:nvSpPr>
+        <p:spPr>
+          <a:xfrm>
+            <a:off x="457200" y="2331720"/>
+            <a:ext cx="5486400" cy="3657600"/>
+          </a:xfrm>
+          <a:prstGeom prst="rect">
+            <a:avLst/>
+          </a:prstGeom>
+          <a:noFill/>
+        </p:spPr>
+        <p:txBody>
+          <a:bodyPr wrap="square">
+            <a:spAutoFit/>
+          </a:bodyPr>
+          <a:lstStyle/>
+          <a:p>
             <a:pPr>
               <a:spcAft>
-                <a:spcPts val="800"/>
+                <a:spcPts val="1000"/>
               </a:spcAft>
             </a:pPr>
             <a:r>
-              <a:rPr sz="1700" b="0">
-                <a:solidFill>
-                  <a:srgbClr val="222222"/>
+              <a:rPr sz="1600" b="0">
+                <a:solidFill>
+                  <a:srgbClr val="1A1A1A"/>
                 </a:solidFill>
                 <a:latin typeface="Calibri"/>
               </a:rPr>
@@ -4585,88 +6764,72 @@
           <a:p>
             <a:pPr>
               <a:spcAft>
-                <a:spcPts val="800"/>
+                <a:spcPts val="1000"/>
               </a:spcAft>
             </a:pPr>
             <a:r>
-              <a:rPr sz="1700" b="0">
-                <a:solidFill>
-                  <a:srgbClr val="222222"/>
+              <a:rPr sz="1600" b="0">
+                <a:solidFill>
+                  <a:srgbClr val="1A1A1A"/>
                 </a:solidFill>
                 <a:latin typeface="Calibri"/>
               </a:rPr>
-              <a:t>•  Baselines: mean RMSE 27.9 · seasonal-naive 12.1</a:t>
+              <a:t>•  Mean baseline RMSE 27.9 — seasonal naive is the real bar</a:t>
             </a:r>
           </a:p>
           <a:p>
             <a:pPr>
               <a:spcAft>
-                <a:spcPts val="800"/>
+                <a:spcPts val="1000"/>
               </a:spcAft>
             </a:pPr>
             <a:r>
-              <a:rPr sz="1700" b="0">
-                <a:solidFill>
-                  <a:srgbClr val="222222"/>
+              <a:rPr sz="1600" b="0">
+                <a:solidFill>
+                  <a:srgbClr val="1A1A1A"/>
                 </a:solidFill>
                 <a:latin typeface="Calibri"/>
               </a:rPr>
-              <a:t>•  Winner: HistGBM tuned → RMSE 10.16 · MAE 6.41</a:t>
+              <a:t>•  Winner: HistGBM (D6 tuned) · MAE ≈ 6.41</a:t>
             </a:r>
           </a:p>
           <a:p>
             <a:pPr>
               <a:spcAft>
-                <a:spcPts val="800"/>
+                <a:spcPts val="1000"/>
               </a:spcAft>
             </a:pPr>
             <a:r>
-              <a:rPr sz="1700" b="0">
-                <a:solidFill>
-                  <a:srgbClr val="222222"/>
+              <a:rPr sz="1600" b="0">
+                <a:solidFill>
+                  <a:srgbClr val="1A1A1A"/>
                 </a:solidFill>
                 <a:latin typeface="Calibri"/>
               </a:rPr>
-              <a:t>•  Rolling origin (5 folds): 11.06 ± 0.42 RMSE</a:t>
+              <a:t>•  Ablation: calendar 10.43 → +weather+events 10.16 (−0.27)</a:t>
             </a:r>
           </a:p>
           <a:p>
             <a:pPr>
               <a:spcAft>
-                <a:spcPts val="800"/>
+                <a:spcPts val="1000"/>
               </a:spcAft>
             </a:pPr>
             <a:r>
-              <a:rPr sz="1700" b="0">
-                <a:solidFill>
-                  <a:srgbClr val="222222"/>
+              <a:rPr sz="1600" b="0">
+                <a:solidFill>
+                  <a:srgbClr val="1A1A1A"/>
                 </a:solidFill>
                 <a:latin typeface="Calibri"/>
               </a:rPr>
-              <a:t>•  Ablation (tuned): calendar 10.43 → +events+weather 10.16 (−0.27)</a:t>
-            </a:r>
-          </a:p>
-          <a:p>
-            <a:pPr>
-              <a:spcAft>
-                <a:spcPts val="800"/>
-              </a:spcAft>
-            </a:pPr>
-            <a:r>
-              <a:rPr sz="1700" b="0">
-                <a:solidFill>
-                  <a:srgbClr val="222222"/>
-                </a:solidFill>
-                <a:latin typeface="Calibri"/>
-              </a:rPr>
-              <a:t>•  No leakage: fare / wait / drivers excluded from inputs</a:t>
+              <a:t>•  Rules 5–7: weather+events in model · chronological · no ops leakage</a:t>
             </a:r>
           </a:p>
         </p:txBody>
       </p:sp>
       <p:pic>
         <p:nvPicPr>
-          <p:cNvPr id="4" name="Picture 3" descr="fig10_model_comparison.png"/>
+          <p:cNvPr id="19" name="Picture 18" descr="fig10_model_comparison.png"/>
           <p:cNvPicPr>
             <a:picLocks noChangeAspect="1"/>
           </p:cNvPicPr>
@@ -4680,14 +6843,91 @@
         </p:blipFill>
         <p:spPr>
           <a:xfrm>
-            <a:off x="6309360" y="1234440"/>
-            <a:ext cx="5486400" cy="2977376"/>
+            <a:off x="6126480" y="2286000"/>
+            <a:ext cx="5577840" cy="3026998"/>
           </a:xfrm>
           <a:prstGeom prst="rect">
             <a:avLst/>
           </a:prstGeom>
         </p:spPr>
       </p:pic>
+      <p:sp>
+        <p:nvSpPr>
+          <p:cNvPr id="20" name="Rectangle 19"/>
+          <p:cNvSpPr/>
+          <p:nvPr/>
+        </p:nvSpPr>
+        <p:spPr>
+          <a:xfrm>
+            <a:off x="411480" y="6446520"/>
+            <a:ext cx="11338560" cy="13716"/>
+          </a:xfrm>
+          <a:prstGeom prst="rect">
+            <a:avLst/>
+          </a:prstGeom>
+          <a:solidFill>
+            <a:srgbClr val="D0D7DE"/>
+          </a:solidFill>
+          <a:ln>
+            <a:noFill/>
+          </a:ln>
+        </p:spPr>
+        <p:style>
+          <a:lnRef idx="1">
+            <a:schemeClr val="accent1"/>
+          </a:lnRef>
+          <a:fillRef idx="3">
+            <a:schemeClr val="accent1"/>
+          </a:fillRef>
+          <a:effectRef idx="2">
+            <a:schemeClr val="accent1"/>
+          </a:effectRef>
+          <a:fontRef idx="minor">
+            <a:schemeClr val="lt1"/>
+          </a:fontRef>
+        </p:style>
+        <p:txBody>
+          <a:bodyPr rtlCol="0" anchor="ctr"/>
+          <a:lstStyle/>
+          <a:p>
+            <a:pPr algn="ctr"/>
+          </a:p>
+        </p:txBody>
+      </p:sp>
+      <p:sp>
+        <p:nvSpPr>
+          <p:cNvPr id="21" name="TextBox 20"/>
+          <p:cNvSpPr txBox="1"/>
+          <p:nvPr/>
+        </p:nvSpPr>
+        <p:spPr>
+          <a:xfrm>
+            <a:off x="411480" y="6492240"/>
+            <a:ext cx="11338560" cy="320040"/>
+          </a:xfrm>
+          <a:prstGeom prst="rect">
+            <a:avLst/>
+          </a:prstGeom>
+          <a:noFill/>
+        </p:spPr>
+        <p:txBody>
+          <a:bodyPr wrap="none">
+            <a:spAutoFit/>
+          </a:bodyPr>
+          <a:lstStyle/>
+          <a:p>
+            <a:r>
+              <a:rPr sz="1100" b="0">
+                <a:solidFill>
+                  <a:srgbClr val="5A5A5A"/>
+                </a:solidFill>
+                <a:latin typeface="Calibri"/>
+              </a:rPr>
+              <a:t>Addis Demand AI  ·  IDAE · EDI-Qiyas-CoDiST Advanced Digital Skills Program  ·  4/5</a:t>
+            </a:r>
+          </a:p>
+        </p:txBody>
+      </p:sp>
     </p:spTree>
   </p:cSld>
   <p:clrMapOvr>
@@ -4715,7 +6955,50 @@
         <p:spPr>
           <a:xfrm>
             <a:off x="0" y="0"/>
-            <a:ext cx="12191695" cy="960120"/>
+            <a:ext cx="12191695" cy="6858000"/>
+          </a:xfrm>
+          <a:prstGeom prst="rect">
+            <a:avLst/>
+          </a:prstGeom>
+          <a:solidFill>
+            <a:srgbClr val="F4F7FA"/>
+          </a:solidFill>
+          <a:ln>
+            <a:noFill/>
+          </a:ln>
+        </p:spPr>
+        <p:style>
+          <a:lnRef idx="1">
+            <a:schemeClr val="accent1"/>
+          </a:lnRef>
+          <a:fillRef idx="3">
+            <a:schemeClr val="accent1"/>
+          </a:fillRef>
+          <a:effectRef idx="2">
+            <a:schemeClr val="accent1"/>
+          </a:effectRef>
+          <a:fontRef idx="minor">
+            <a:schemeClr val="lt1"/>
+          </a:fontRef>
+        </p:style>
+        <p:txBody>
+          <a:bodyPr rtlCol="0" anchor="ctr"/>
+          <a:lstStyle/>
+          <a:p>
+            <a:pPr algn="ctr"/>
+          </a:p>
+        </p:txBody>
+      </p:sp>
+      <p:sp>
+        <p:nvSpPr>
+          <p:cNvPr id="3" name="Rectangle 2"/>
+          <p:cNvSpPr/>
+          <p:nvPr/>
+        </p:nvSpPr>
+        <p:spPr>
+          <a:xfrm>
+            <a:off x="0" y="0"/>
+            <a:ext cx="12191695" cy="868680"/>
           </a:xfrm>
           <a:prstGeom prst="rect">
             <a:avLst/>
@@ -4742,32 +7025,127 @@
           </a:fontRef>
         </p:style>
         <p:txBody>
-          <a:bodyPr rtlCol="0" anchor="ctr" lIns="365760" tIns="228600"/>
+          <a:bodyPr rtlCol="0" anchor="ctr" wrap="square" lIns="411480" tIns="201168" rIns="1097280"/>
           <a:lstStyle/>
           <a:p>
             <a:pPr algn="l"/>
             <a:r>
-              <a:rPr sz="2600" b="1">
+              <a:rPr sz="2400" b="1">
                 <a:solidFill>
                   <a:srgbClr val="FFFFFF"/>
                 </a:solidFill>
                 <a:latin typeface="Calibri"/>
               </a:rPr>
-              <a:t>5 · Errors, score, demo — and what’s next</a:t>
-            </a:r>
-          </a:p>
-        </p:txBody>
-      </p:sp>
-      <p:sp>
-        <p:nvSpPr>
-          <p:cNvPr id="3" name="TextBox 2"/>
+              <a:t>5  ·  Errors, score, demo — and what’s next</a:t>
+            </a:r>
+          </a:p>
+        </p:txBody>
+      </p:sp>
+      <p:sp>
+        <p:nvSpPr>
+          <p:cNvPr id="4" name="Rectangle 3"/>
+          <p:cNvSpPr/>
+          <p:nvPr/>
+        </p:nvSpPr>
+        <p:spPr>
+          <a:xfrm>
+            <a:off x="0" y="868680"/>
+            <a:ext cx="12191695" cy="73152"/>
+          </a:xfrm>
+          <a:prstGeom prst="rect">
+            <a:avLst/>
+          </a:prstGeom>
+          <a:solidFill>
+            <a:srgbClr val="0072B2"/>
+          </a:solidFill>
+          <a:ln>
+            <a:noFill/>
+          </a:ln>
+        </p:spPr>
+        <p:style>
+          <a:lnRef idx="1">
+            <a:schemeClr val="accent1"/>
+          </a:lnRef>
+          <a:fillRef idx="3">
+            <a:schemeClr val="accent1"/>
+          </a:fillRef>
+          <a:effectRef idx="2">
+            <a:schemeClr val="accent1"/>
+          </a:effectRef>
+          <a:fontRef idx="minor">
+            <a:schemeClr val="lt1"/>
+          </a:fontRef>
+        </p:style>
+        <p:txBody>
+          <a:bodyPr rtlCol="0" anchor="ctr"/>
+          <a:lstStyle/>
+          <a:p>
+            <a:pPr algn="ctr"/>
+          </a:p>
+        </p:txBody>
+      </p:sp>
+      <p:sp>
+        <p:nvSpPr>
+          <p:cNvPr id="5" name="Rounded Rectangle 4"/>
+          <p:cNvSpPr/>
+          <p:nvPr/>
+        </p:nvSpPr>
+        <p:spPr>
+          <a:xfrm>
+            <a:off x="11109960" y="256032"/>
+            <a:ext cx="777240" cy="365760"/>
+          </a:xfrm>
+          <a:prstGeom prst="roundRect">
+            <a:avLst/>
+          </a:prstGeom>
+          <a:solidFill>
+            <a:srgbClr val="0072B2"/>
+          </a:solidFill>
+          <a:ln>
+            <a:noFill/>
+          </a:ln>
+        </p:spPr>
+        <p:style>
+          <a:lnRef idx="1">
+            <a:schemeClr val="accent1"/>
+          </a:lnRef>
+          <a:fillRef idx="3">
+            <a:schemeClr val="accent1"/>
+          </a:fillRef>
+          <a:effectRef idx="2">
+            <a:schemeClr val="accent1"/>
+          </a:effectRef>
+          <a:fontRef idx="minor">
+            <a:schemeClr val="lt1"/>
+          </a:fontRef>
+        </p:style>
+        <p:txBody>
+          <a:bodyPr rtlCol="0" anchor="ctr"/>
+          <a:lstStyle/>
+          <a:p>
+            <a:pPr algn="ctr"/>
+            <a:r>
+              <a:rPr sz="1200" b="1">
+                <a:solidFill>
+                  <a:srgbClr val="FFFFFF"/>
+                </a:solidFill>
+                <a:latin typeface="Calibri"/>
+              </a:rPr>
+              <a:t>5/5</a:t>
+            </a:r>
+          </a:p>
+        </p:txBody>
+      </p:sp>
+      <p:sp>
+        <p:nvSpPr>
+          <p:cNvPr id="6" name="TextBox 5"/>
           <p:cNvSpPr txBox="1"/>
           <p:nvPr/>
         </p:nvSpPr>
         <p:spPr>
           <a:xfrm>
-            <a:off x="411480" y="1188720"/>
-            <a:ext cx="11155680" cy="5303520"/>
+            <a:off x="457200" y="1097280"/>
+            <a:ext cx="5669280" cy="3291840"/>
           </a:xfrm>
           <a:prstGeom prst="rect">
             <a:avLst/>
@@ -4782,97 +7160,256 @@
           <a:p>
             <a:pPr>
               <a:spcAft>
-                <a:spcPts val="800"/>
+                <a:spcPts val="1000"/>
               </a:spcAft>
             </a:pPr>
             <a:r>
-              <a:rPr sz="1800" b="0">
-                <a:solidFill>
-                  <a:srgbClr val="222222"/>
+              <a:rPr sz="1500" b="0">
+                <a:solidFill>
+                  <a:srgbClr val="1A1A1A"/>
                 </a:solidFill>
                 <a:latin typeface="Calibri"/>
               </a:rPr>
-              <a:t>•  Errors concentrate on peak hours, holidays, and event spikes (some unlisted in the calendar)</a:t>
+              <a:t>•  Errors peak on rush hours, holidays, and unlisted event spikes</a:t>
             </a:r>
           </a:p>
           <a:p>
             <a:pPr>
               <a:spcAft>
-                <a:spcPts val="800"/>
+                <a:spcPts val="1000"/>
               </a:spcAft>
             </a:pPr>
             <a:r>
-              <a:rPr sz="1800" b="0">
-                <a:solidFill>
-                  <a:srgbClr val="222222"/>
+              <a:rPr sz="1500" b="0">
+                <a:solidFill>
+                  <a:srgbClr val="1A1A1A"/>
                 </a:solidFill>
                 <a:latin typeface="Calibri"/>
               </a:rPr>
-              <a:t>•  Tried peak/rain interactions after D7 — did not help; we kept the simpler tuned model</a:t>
+              <a:t>•  Tried peak/rain interactions after D7 — no gain; kept simpler model</a:t>
             </a:r>
           </a:p>
           <a:p>
             <a:pPr>
               <a:spcAft>
-                <a:spcPts val="800"/>
+                <a:spcPts val="1000"/>
               </a:spcAft>
             </a:pPr>
             <a:r>
-              <a:rPr sz="1800" b="0">
-                <a:solidFill>
-                  <a:srgbClr val="222222"/>
+              <a:rPr sz="1500" b="0">
+                <a:solidFill>
+                  <a:srgbClr val="1A1A1A"/>
                 </a:solidFill>
                 <a:latin typeface="Calibri"/>
               </a:rPr>
-              <a:t>•  Final validation: RMSE ≈ 10.2 trips/zone-hour (~MAE 6.4) → ~±5 drivers buffer at 1.3 trips/driver-hour</a:t>
+              <a:t>•  Ops buffer: MAE ≈ 6.4 trips/h → ~±5 drivers at 1.3 trips/driver-hour</a:t>
             </a:r>
           </a:p>
           <a:p>
             <a:pPr>
               <a:spcAft>
-                <a:spcPts val="800"/>
+                <a:spcPts val="1000"/>
               </a:spcAft>
             </a:pPr>
             <a:r>
-              <a:rPr sz="1800" b="0">
-                <a:solidFill>
-                  <a:srgbClr val="222222"/>
+              <a:rPr sz="1500" b="0">
+                <a:solidFill>
+                  <a:srgbClr val="1A1A1A"/>
                 </a:solidFill>
                 <a:latin typeface="Calibri"/>
               </a:rPr>
-              <a:t>•  Demo (local):  python -m streamlit run app/app.py   →  http://localhost:8501</a:t>
+              <a:t>•  Submission: 4,032 rows · team_addis_demand_ai_submission.csv</a:t>
             </a:r>
           </a:p>
           <a:p>
             <a:pPr>
               <a:spcAft>
-                <a:spcPts val="800"/>
+                <a:spcPts val="1000"/>
               </a:spcAft>
             </a:pPr>
             <a:r>
-              <a:rPr sz="1800" b="0">
-                <a:solidFill>
-                  <a:srgbClr val="222222"/>
+              <a:rPr sz="1500" b="0">
+                <a:solidFill>
+                  <a:srgbClr val="1A1A1A"/>
                 </a:solidFill>
                 <a:latin typeface="Calibri"/>
               </a:rPr>
-              <a:t>•  Submission: 4,032 rows · team_addis_demand_ai_submission.csv · Team: Addis Demand AI</a:t>
-            </a:r>
-          </a:p>
-          <a:p>
-            <a:pPr>
-              <a:spcAft>
-                <a:spcPts val="800"/>
-              </a:spcAft>
-            </a:pPr>
-            <a:r>
-              <a:rPr sz="1800" b="0">
-                <a:solidFill>
-                  <a:srgbClr val="222222"/>
+              <a:t>•  Next: quantile intervals · Ayat-specific model · drift monitoring</a:t>
+            </a:r>
+          </a:p>
+        </p:txBody>
+      </p:sp>
+      <p:sp>
+        <p:nvSpPr>
+          <p:cNvPr id="7" name="Rounded Rectangle 6"/>
+          <p:cNvSpPr/>
+          <p:nvPr/>
+        </p:nvSpPr>
+        <p:spPr>
+          <a:xfrm>
+            <a:off x="457200" y="4572000"/>
+            <a:ext cx="5669280" cy="1554480"/>
+          </a:xfrm>
+          <a:prstGeom prst="roundRect">
+            <a:avLst/>
+          </a:prstGeom>
+          <a:solidFill>
+            <a:srgbClr val="0B3D5C"/>
+          </a:solidFill>
+          <a:ln>
+            <a:noFill/>
+          </a:ln>
+        </p:spPr>
+        <p:style>
+          <a:lnRef idx="1">
+            <a:schemeClr val="accent1"/>
+          </a:lnRef>
+          <a:fillRef idx="3">
+            <a:schemeClr val="accent1"/>
+          </a:fillRef>
+          <a:effectRef idx="2">
+            <a:schemeClr val="accent1"/>
+          </a:effectRef>
+          <a:fontRef idx="minor">
+            <a:schemeClr val="lt1"/>
+          </a:fontRef>
+        </p:style>
+        <p:txBody>
+          <a:bodyPr rtlCol="0" anchor="ctr" wrap="square" lIns="274320" tIns="228600"/>
+          <a:lstStyle/>
+          <a:p>
+            <a:pPr algn="ctr"/>
+            <a:r>
+              <a:rPr sz="1400" b="1">
+                <a:solidFill>
+                  <a:srgbClr val="0072B2"/>
                 </a:solidFill>
                 <a:latin typeface="Calibri"/>
               </a:rPr>
-              <a:t>•  Next: quantile intervals for ops buffers · zone-specific models for Ayat · monitor drift after launch</a:t>
+              <a:t>Live demo</a:t>
+            </a:r>
+          </a:p>
+          <a:p>
+            <a:r>
+              <a:rPr sz="2200" b="1">
+                <a:solidFill>
+                  <a:srgbClr val="FFFFFF"/>
+                </a:solidFill>
+                <a:latin typeface="Calibri"/>
+              </a:rPr>
+              <a:t>localhost:8501</a:t>
+            </a:r>
+          </a:p>
+          <a:p>
+            <a:r>
+              <a:rPr sz="1200" b="0">
+                <a:solidFill>
+                  <a:srgbClr val="FFFFFF"/>
+                </a:solidFill>
+                <a:latin typeface="Calibri"/>
+              </a:rPr>
+              <a:t>Zone + date only · auto weather/events · Streamlit</a:t>
+            </a:r>
+          </a:p>
+        </p:txBody>
+      </p:sp>
+      <p:pic>
+        <p:nvPicPr>
+          <p:cNvPr id="8" name="Picture 7" descr="fig11_forecast_vs_actual.png"/>
+          <p:cNvPicPr>
+            <a:picLocks noChangeAspect="1"/>
+          </p:cNvPicPr>
+          <p:nvPr/>
+        </p:nvPicPr>
+        <p:blipFill>
+          <a:blip r:embed="rId2"/>
+          <a:stretch>
+            <a:fillRect/>
+          </a:stretch>
+        </p:blipFill>
+        <p:spPr>
+          <a:xfrm>
+            <a:off x="6309360" y="1097280"/>
+            <a:ext cx="5394960" cy="4425932"/>
+          </a:xfrm>
+          <a:prstGeom prst="rect">
+            <a:avLst/>
+          </a:prstGeom>
+        </p:spPr>
+      </p:pic>
+      <p:sp>
+        <p:nvSpPr>
+          <p:cNvPr id="9" name="Rectangle 8"/>
+          <p:cNvSpPr/>
+          <p:nvPr/>
+        </p:nvSpPr>
+        <p:spPr>
+          <a:xfrm>
+            <a:off x="411480" y="6446520"/>
+            <a:ext cx="11338560" cy="13716"/>
+          </a:xfrm>
+          <a:prstGeom prst="rect">
+            <a:avLst/>
+          </a:prstGeom>
+          <a:solidFill>
+            <a:srgbClr val="D0D7DE"/>
+          </a:solidFill>
+          <a:ln>
+            <a:noFill/>
+          </a:ln>
+        </p:spPr>
+        <p:style>
+          <a:lnRef idx="1">
+            <a:schemeClr val="accent1"/>
+          </a:lnRef>
+          <a:fillRef idx="3">
+            <a:schemeClr val="accent1"/>
+          </a:fillRef>
+          <a:effectRef idx="2">
+            <a:schemeClr val="accent1"/>
+          </a:effectRef>
+          <a:fontRef idx="minor">
+            <a:schemeClr val="lt1"/>
+          </a:fontRef>
+        </p:style>
+        <p:txBody>
+          <a:bodyPr rtlCol="0" anchor="ctr"/>
+          <a:lstStyle/>
+          <a:p>
+            <a:pPr algn="ctr"/>
+          </a:p>
+        </p:txBody>
+      </p:sp>
+      <p:sp>
+        <p:nvSpPr>
+          <p:cNvPr id="10" name="TextBox 9"/>
+          <p:cNvSpPr txBox="1"/>
+          <p:nvPr/>
+        </p:nvSpPr>
+        <p:spPr>
+          <a:xfrm>
+            <a:off x="411480" y="6492240"/>
+            <a:ext cx="11338560" cy="320040"/>
+          </a:xfrm>
+          <a:prstGeom prst="rect">
+            <a:avLst/>
+          </a:prstGeom>
+          <a:noFill/>
+        </p:spPr>
+        <p:txBody>
+          <a:bodyPr wrap="none">
+            <a:spAutoFit/>
+          </a:bodyPr>
+          <a:lstStyle/>
+          <a:p>
+            <a:r>
+              <a:rPr sz="1100" b="0">
+                <a:solidFill>
+                  <a:srgbClr val="5A5A5A"/>
+                </a:solidFill>
+                <a:latin typeface="Calibri"/>
+              </a:rPr>
+              <a:t>Addis Demand AI  ·  IDAE · EDI-Qiyas-CoDiST Advanced Digital Skills Program  ·  5/5</a:t>
             </a:r>
           </a:p>
         </p:txBody>
